--- a/public/samples/sales-deck.pptx
+++ b/public/samples/sales-deck.pptx
@@ -17,11 +17,9 @@
     <p:sldId id="265" r:id="rId11"/>
     <p:sldId id="266" r:id="rId12"/>
     <p:sldId id="267" r:id="rId13"/>
-    <p:sldId id="268" r:id="rId14"/>
-    <p:sldId id="269" r:id="rId15"/>
   </p:sldIdLst>
   <p:notesMasterIdLst>
-    <p:notesMasterId r:id="rId16"/>
+    <p:notesMasterId r:id="rId14"/>
   </p:notesMasterIdLst>
   <p:sldSz cx="9144000" cy="5143500"/>
   <p:notesSz cx="5143500" cy="9144000"/>
@@ -803,182 +801,6 @@
             <a:fld id="{F7021451-1387-4CA6-816F-3879F97B5CBC}" type="slidenum">
               <a:rPr lang="en-US"/>
               <a:t>12</a:t>
-            </a:fld>
-            <a:endParaRPr lang="en-US"/>
-          </a:p>
-        </p:txBody>
-      </p:sp>
-    </p:spTree>
-    <p:extLst>
-      <p:ext uri="{BB962C8B-B14F-4D97-AF65-F5344CB8AC3E}">
-        <p14:creationId xmlns:p14="http://schemas.microsoft.com/office/powerpoint/2010/main" val="1024086991"/>
-      </p:ext>
-    </p:extLst>
-  </p:cSld>
-  <p:clrMapOvr>
-    <a:masterClrMapping/>
-  </p:clrMapOvr>
-</p:notes>
-</file>
-
-<file path=ppt/notesSlides/notesSlide13.xml><?xml version="1.0" encoding="utf-8"?>
-<p:notes xmlns:a="http://schemas.openxmlformats.org/drawingml/2006/main" xmlns:r="http://schemas.openxmlformats.org/officeDocument/2006/relationships" xmlns:p="http://schemas.openxmlformats.org/presentationml/2006/main">
-  <p:cSld>
-    <p:spTree>
-      <p:nvGrpSpPr>
-        <p:cNvPr id="1" name=""/>
-        <p:cNvGrpSpPr/>
-        <p:nvPr/>
-      </p:nvGrpSpPr>
-      <p:grpSpPr>
-        <a:xfrm>
-          <a:off x="0" y="0"/>
-          <a:ext cx="0" cy="0"/>
-          <a:chOff x="0" y="0"/>
-          <a:chExt cx="0" cy="0"/>
-        </a:xfrm>
-      </p:grpSpPr>
-      <p:sp>
-        <p:nvSpPr>
-          <p:cNvPr id="2" name="Slide Image Placeholder 1"/>
-          <p:cNvSpPr>
-            <a:spLocks noGrp="1" noRot="1" noChangeAspect="1"/>
-          </p:cNvSpPr>
-          <p:nvPr>
-            <p:ph type="sldImg"/>
-          </p:nvPr>
-        </p:nvSpPr>
-        <p:spPr/>
-      </p:sp>
-      <p:sp>
-        <p:nvSpPr>
-          <p:cNvPr id="3" name="Notes Placeholder 2"/>
-          <p:cNvSpPr>
-            <a:spLocks noGrp="1"/>
-          </p:cNvSpPr>
-          <p:nvPr>
-            <p:ph type="body" idx="1"/>
-          </p:nvPr>
-        </p:nvSpPr>
-        <p:spPr/>
-        <p:txBody>
-          <a:bodyPr/>
-          <a:lstStyle/>
-          <a:p>
-            <a:r>
-              <a:rPr lang="en-US" dirty="0"/>
-              <a:t/>
-            </a:r>
-            <a:endParaRPr lang="en-US" dirty="0"/>
-          </a:p>
-        </p:txBody>
-      </p:sp>
-      <p:sp>
-        <p:nvSpPr>
-          <p:cNvPr id="4" name="Slide Number Placeholder 3"/>
-          <p:cNvSpPr>
-            <a:spLocks noGrp="1"/>
-          </p:cNvSpPr>
-          <p:nvPr>
-            <p:ph type="sldNum" sz="quarter" idx="10"/>
-          </p:nvPr>
-        </p:nvSpPr>
-        <p:spPr/>
-        <p:txBody>
-          <a:bodyPr/>
-          <a:lstStyle/>
-          <a:p>
-            <a:fld id="{F7021451-1387-4CA6-816F-3879F97B5CBC}" type="slidenum">
-              <a:rPr lang="en-US"/>
-              <a:t>13</a:t>
-            </a:fld>
-            <a:endParaRPr lang="en-US"/>
-          </a:p>
-        </p:txBody>
-      </p:sp>
-    </p:spTree>
-    <p:extLst>
-      <p:ext uri="{BB962C8B-B14F-4D97-AF65-F5344CB8AC3E}">
-        <p14:creationId xmlns:p14="http://schemas.microsoft.com/office/powerpoint/2010/main" val="1024086991"/>
-      </p:ext>
-    </p:extLst>
-  </p:cSld>
-  <p:clrMapOvr>
-    <a:masterClrMapping/>
-  </p:clrMapOvr>
-</p:notes>
-</file>
-
-<file path=ppt/notesSlides/notesSlide14.xml><?xml version="1.0" encoding="utf-8"?>
-<p:notes xmlns:a="http://schemas.openxmlformats.org/drawingml/2006/main" xmlns:r="http://schemas.openxmlformats.org/officeDocument/2006/relationships" xmlns:p="http://schemas.openxmlformats.org/presentationml/2006/main">
-  <p:cSld>
-    <p:spTree>
-      <p:nvGrpSpPr>
-        <p:cNvPr id="1" name=""/>
-        <p:cNvGrpSpPr/>
-        <p:nvPr/>
-      </p:nvGrpSpPr>
-      <p:grpSpPr>
-        <a:xfrm>
-          <a:off x="0" y="0"/>
-          <a:ext cx="0" cy="0"/>
-          <a:chOff x="0" y="0"/>
-          <a:chExt cx="0" cy="0"/>
-        </a:xfrm>
-      </p:grpSpPr>
-      <p:sp>
-        <p:nvSpPr>
-          <p:cNvPr id="2" name="Slide Image Placeholder 1"/>
-          <p:cNvSpPr>
-            <a:spLocks noGrp="1" noRot="1" noChangeAspect="1"/>
-          </p:cNvSpPr>
-          <p:nvPr>
-            <p:ph type="sldImg"/>
-          </p:nvPr>
-        </p:nvSpPr>
-        <p:spPr/>
-      </p:sp>
-      <p:sp>
-        <p:nvSpPr>
-          <p:cNvPr id="3" name="Notes Placeholder 2"/>
-          <p:cNvSpPr>
-            <a:spLocks noGrp="1"/>
-          </p:cNvSpPr>
-          <p:nvPr>
-            <p:ph type="body" idx="1"/>
-          </p:nvPr>
-        </p:nvSpPr>
-        <p:spPr/>
-        <p:txBody>
-          <a:bodyPr/>
-          <a:lstStyle/>
-          <a:p>
-            <a:r>
-              <a:rPr lang="en-US" dirty="0"/>
-              <a:t/>
-            </a:r>
-            <a:endParaRPr lang="en-US" dirty="0"/>
-          </a:p>
-        </p:txBody>
-      </p:sp>
-      <p:sp>
-        <p:nvSpPr>
-          <p:cNvPr id="4" name="Slide Number Placeholder 3"/>
-          <p:cNvSpPr>
-            <a:spLocks noGrp="1"/>
-          </p:cNvSpPr>
-          <p:nvPr>
-            <p:ph type="sldNum" sz="quarter" idx="10"/>
-          </p:nvPr>
-        </p:nvSpPr>
-        <p:spPr/>
-        <p:txBody>
-          <a:bodyPr/>
-          <a:lstStyle/>
-          <a:p>
-            <a:fld id="{F7021451-1387-4CA6-816F-3879F97B5CBC}" type="slidenum">
-              <a:rPr lang="en-US"/>
-              <a:t>14</a:t>
             </a:fld>
             <a:endParaRPr lang="en-US"/>
           </a:p>
@@ -2074,9 +1896,9 @@
                 <a:solidFill>
                   <a:srgbClr val="0B5CAB"/>
                 </a:solidFill>
-                <a:latin typeface="Calibri" pitchFamily="34" charset="0"/>
-                <a:ea typeface="Calibri" pitchFamily="34" charset="-122"/>
-                <a:cs typeface="Calibri" pitchFamily="34" charset="-120"/>
+                <a:latin typeface="Yu Gothic" pitchFamily="34" charset="0"/>
+                <a:ea typeface="Yu Gothic" pitchFamily="34" charset="-122"/>
+                <a:cs typeface="Yu Gothic" pitchFamily="34" charset="-120"/>
               </a:rPr>
               <a:t>営業提案スライド（見本）</a:t>
             </a:r>
@@ -2113,9 +1935,9 @@
                 <a:solidFill>
                   <a:srgbClr val="5A5A5A"/>
                 </a:solidFill>
-                <a:latin typeface="Calibri" pitchFamily="34" charset="0"/>
-                <a:ea typeface="Calibri" pitchFamily="34" charset="-122"/>
-                <a:cs typeface="Calibri" pitchFamily="34" charset="-120"/>
+                <a:latin typeface="Yu Gothic" pitchFamily="34" charset="0"/>
+                <a:ea typeface="Yu Gothic" pitchFamily="34" charset="-122"/>
+                <a:cs typeface="Yu Gothic" pitchFamily="34" charset="-120"/>
               </a:rPr>
               <a:t>目的</a:t>
             </a:r>
@@ -2152,9 +1974,9 @@
                 <a:solidFill>
                   <a:srgbClr val="FFFFFF"/>
                 </a:solidFill>
-                <a:latin typeface="Calibri" pitchFamily="34" charset="0"/>
-                <a:ea typeface="Calibri" pitchFamily="34" charset="-122"/>
-                <a:cs typeface="Calibri" pitchFamily="34" charset="-120"/>
+                <a:latin typeface="Yu Gothic" pitchFamily="34" charset="0"/>
+                <a:ea typeface="Yu Gothic" pitchFamily="34" charset="-122"/>
+                <a:cs typeface="Yu Gothic" pitchFamily="34" charset="-120"/>
               </a:rPr>
               <a:t>P304TMPL_PROPOSAL</a:t>
             </a:r>
@@ -2170,8 +1992,8 @@
         </p:nvSpPr>
         <p:spPr>
           <a:xfrm>
-            <a:off x="548640" y="4389120"/>
-            <a:ext cx="8046720" cy="365760"/>
+            <a:off x="548640" y="4434840"/>
+            <a:ext cx="8046720" cy="320040"/>
           </a:xfrm>
           <a:prstGeom prst="rect">
             <a:avLst/>
@@ -2187,17 +2009,17 @@
               <a:buNone/>
             </a:pPr>
             <a:r>
-              <a:rPr lang="en-US" sz="1200" dirty="0">
+              <a:rPr lang="en-US" sz="1100" dirty="0">
                 <a:solidFill>
                   <a:srgbClr val="5A5A5A"/>
                 </a:solidFill>
-                <a:latin typeface="Calibri" pitchFamily="34" charset="0"/>
-                <a:ea typeface="Calibri" pitchFamily="34" charset="-122"/>
-                <a:cs typeface="Calibri" pitchFamily="34" charset="-120"/>
+                <a:latin typeface="Yu Gothic" pitchFamily="34" charset="0"/>
+                <a:ea typeface="Yu Gothic" pitchFamily="34" charset="-122"/>
+                <a:cs typeface="Yu Gothic" pitchFamily="34" charset="-120"/>
               </a:rPr>
-              <a:t>Generated by Atlas · 2026年8月10日</a:t>
-            </a:r>
-            <a:endParaRPr lang="en-US" sz="1200" dirty="0"/>
+              <a:t>MINERVOT · 2026年8月22日</a:t>
+            </a:r>
+            <a:endParaRPr lang="en-US" sz="1100" dirty="0"/>
           </a:p>
         </p:txBody>
       </p:sp>
@@ -2275,11 +2097,11 @@
                 <a:solidFill>
                   <a:srgbClr val="0B5CAB"/>
                 </a:solidFill>
-                <a:latin typeface="Calibri" pitchFamily="34" charset="0"/>
-                <a:ea typeface="Calibri" pitchFamily="34" charset="-122"/>
-                <a:cs typeface="Calibri" pitchFamily="34" charset="-120"/>
+                <a:latin typeface="Yu Gothic" pitchFamily="34" charset="0"/>
+                <a:ea typeface="Yu Gothic" pitchFamily="34" charset="-122"/>
+                <a:cs typeface="Yu Gothic" pitchFamily="34" charset="-120"/>
               </a:rPr>
-              <a:t>効果</a:t>
+              <a:t>次のアクション</a:t>
             </a:r>
             <a:endParaRPr lang="en-US" sz="2400" dirty="0"/>
           </a:p>
@@ -2308,9 +2130,1676 @@
           </a:ln>
         </p:spPr>
       </p:sp>
+      <p:sp>
+        <p:nvSpPr>
+          <p:cNvPr id="5" name="Shape 3"/>
+          <p:cNvSpPr/>
+          <p:nvPr/>
+        </p:nvSpPr>
+        <p:spPr>
+          <a:xfrm>
+            <a:off x="594360" y="1234440"/>
+            <a:ext cx="2493264" cy="3108960"/>
+          </a:xfrm>
+          <a:prstGeom prst="roundRect">
+            <a:avLst>
+              <a:gd name="adj" fmla="val 2200"/>
+            </a:avLst>
+          </a:prstGeom>
+          <a:solidFill>
+            <a:srgbClr val="F7F9FC"/>
+          </a:solidFill>
+          <a:ln w="12700">
+            <a:solidFill>
+              <a:srgbClr val="C9DBED"/>
+            </a:solidFill>
+            <a:prstDash val="solid"/>
+          </a:ln>
+        </p:spPr>
+      </p:sp>
+      <p:sp>
+        <p:nvSpPr>
+          <p:cNvPr id="6" name="Shape 4"/>
+          <p:cNvSpPr/>
+          <p:nvPr/>
+        </p:nvSpPr>
+        <p:spPr>
+          <a:xfrm>
+            <a:off x="1639824" y="1417320"/>
+            <a:ext cx="402336" cy="402336"/>
+          </a:xfrm>
+          <a:prstGeom prst="ellipse">
+            <a:avLst/>
+          </a:prstGeom>
+          <a:solidFill>
+            <a:srgbClr val="0B5CAB"/>
+          </a:solidFill>
+          <a:ln/>
+        </p:spPr>
+      </p:sp>
+      <p:sp>
+        <p:nvSpPr>
+          <p:cNvPr id="7" name="Text 5"/>
+          <p:cNvSpPr/>
+          <p:nvPr/>
+        </p:nvSpPr>
+        <p:spPr>
+          <a:xfrm>
+            <a:off x="1639824" y="1453896"/>
+            <a:ext cx="402336" cy="347472"/>
+          </a:xfrm>
+          <a:prstGeom prst="rect">
+            <a:avLst/>
+          </a:prstGeom>
+          <a:noFill/>
+          <a:ln/>
+        </p:spPr>
+        <p:txBody>
+          <a:bodyPr wrap="square" rtlCol="0" anchor="ctr"/>
+          <a:lstStyle/>
+          <a:p>
+            <a:pPr algn="ctr" indent="0" marL="0">
+              <a:buNone/>
+            </a:pPr>
+            <a:r>
+              <a:rPr lang="en-US" sz="1200" b="1" dirty="0">
+                <a:solidFill>
+                  <a:srgbClr val="FFFFFF"/>
+                </a:solidFill>
+                <a:latin typeface="Yu Gothic" pitchFamily="34" charset="0"/>
+                <a:ea typeface="Yu Gothic" pitchFamily="34" charset="-122"/>
+                <a:cs typeface="Yu Gothic" pitchFamily="34" charset="-120"/>
+              </a:rPr>
+              <a:t>1</a:t>
+            </a:r>
+            <a:endParaRPr lang="en-US" sz="1200" dirty="0"/>
+          </a:p>
+        </p:txBody>
+      </p:sp>
+      <p:sp>
+        <p:nvSpPr>
+          <p:cNvPr id="8" name="Text 6"/>
+          <p:cNvSpPr/>
+          <p:nvPr/>
+        </p:nvSpPr>
+        <p:spPr>
+          <a:xfrm>
+            <a:off x="685800" y="1965960"/>
+            <a:ext cx="2310384" cy="2194560"/>
+          </a:xfrm>
+          <a:prstGeom prst="rect">
+            <a:avLst/>
+          </a:prstGeom>
+          <a:noFill/>
+          <a:ln/>
+        </p:spPr>
+        <p:txBody>
+          <a:bodyPr wrap="square" rtlCol="0" anchor="t"/>
+          <a:lstStyle/>
+          <a:p>
+            <a:pPr algn="ctr" indent="0" marL="0">
+              <a:buNone/>
+            </a:pPr>
+            <a:r>
+              <a:rPr lang="en-US" sz="1300" dirty="0">
+                <a:solidFill>
+                  <a:srgbClr val="1A1A1A"/>
+                </a:solidFill>
+                <a:latin typeface="Yu Gothic" pitchFamily="34" charset="0"/>
+                <a:ea typeface="Yu Gothic" pitchFamily="34" charset="-122"/>
+                <a:cs typeface="Yu Gothic" pitchFamily="34" charset="-120"/>
+              </a:rPr>
+              <a:t>見本ファイルをダウンロードして開く</a:t>
+            </a:r>
+            <a:endParaRPr lang="en-US" sz="1300" dirty="0"/>
+          </a:p>
+        </p:txBody>
+      </p:sp>
+      <p:sp>
+        <p:nvSpPr>
+          <p:cNvPr id="9" name="Shape 7"/>
+          <p:cNvSpPr/>
+          <p:nvPr/>
+        </p:nvSpPr>
+        <p:spPr>
+          <a:xfrm>
+            <a:off x="3233928" y="1234440"/>
+            <a:ext cx="2493264" cy="3108960"/>
+          </a:xfrm>
+          <a:prstGeom prst="roundRect">
+            <a:avLst>
+              <a:gd name="adj" fmla="val 2200"/>
+            </a:avLst>
+          </a:prstGeom>
+          <a:solidFill>
+            <a:srgbClr val="F7F9FC"/>
+          </a:solidFill>
+          <a:ln w="12700">
+            <a:solidFill>
+              <a:srgbClr val="C9DBED"/>
+            </a:solidFill>
+            <a:prstDash val="solid"/>
+          </a:ln>
+        </p:spPr>
+      </p:sp>
+      <p:sp>
+        <p:nvSpPr>
+          <p:cNvPr id="10" name="Shape 8"/>
+          <p:cNvSpPr/>
+          <p:nvPr/>
+        </p:nvSpPr>
+        <p:spPr>
+          <a:xfrm>
+            <a:off x="4279392" y="1417320"/>
+            <a:ext cx="402336" cy="402336"/>
+          </a:xfrm>
+          <a:prstGeom prst="ellipse">
+            <a:avLst/>
+          </a:prstGeom>
+          <a:solidFill>
+            <a:srgbClr val="0B5CAB"/>
+          </a:solidFill>
+          <a:ln/>
+        </p:spPr>
+      </p:sp>
+      <p:sp>
+        <p:nvSpPr>
+          <p:cNvPr id="11" name="Text 9"/>
+          <p:cNvSpPr/>
+          <p:nvPr/>
+        </p:nvSpPr>
+        <p:spPr>
+          <a:xfrm>
+            <a:off x="4279392" y="1453896"/>
+            <a:ext cx="402336" cy="347472"/>
+          </a:xfrm>
+          <a:prstGeom prst="rect">
+            <a:avLst/>
+          </a:prstGeom>
+          <a:noFill/>
+          <a:ln/>
+        </p:spPr>
+        <p:txBody>
+          <a:bodyPr wrap="square" rtlCol="0" anchor="ctr"/>
+          <a:lstStyle/>
+          <a:p>
+            <a:pPr algn="ctr" indent="0" marL="0">
+              <a:buNone/>
+            </a:pPr>
+            <a:r>
+              <a:rPr lang="en-US" sz="1200" b="1" dirty="0">
+                <a:solidFill>
+                  <a:srgbClr val="FFFFFF"/>
+                </a:solidFill>
+                <a:latin typeface="Yu Gothic" pitchFamily="34" charset="0"/>
+                <a:ea typeface="Yu Gothic" pitchFamily="34" charset="-122"/>
+                <a:cs typeface="Yu Gothic" pitchFamily="34" charset="-120"/>
+              </a:rPr>
+              <a:t>2</a:t>
+            </a:r>
+            <a:endParaRPr lang="en-US" sz="1200" dirty="0"/>
+          </a:p>
+        </p:txBody>
+      </p:sp>
+      <p:sp>
+        <p:nvSpPr>
+          <p:cNvPr id="12" name="Text 10"/>
+          <p:cNvSpPr/>
+          <p:nvPr/>
+        </p:nvSpPr>
+        <p:spPr>
+          <a:xfrm>
+            <a:off x="3325368" y="1965960"/>
+            <a:ext cx="2310384" cy="2194560"/>
+          </a:xfrm>
+          <a:prstGeom prst="rect">
+            <a:avLst/>
+          </a:prstGeom>
+          <a:noFill/>
+          <a:ln/>
+        </p:spPr>
+        <p:txBody>
+          <a:bodyPr wrap="square" rtlCol="0" anchor="t"/>
+          <a:lstStyle/>
+          <a:p>
+            <a:pPr algn="ctr" indent="0" marL="0">
+              <a:buNone/>
+            </a:pPr>
+            <a:r>
+              <a:rPr lang="en-US" sz="1300" dirty="0">
+                <a:solidFill>
+                  <a:srgbClr val="1A1A1A"/>
+                </a:solidFill>
+                <a:latin typeface="Yu Gothic" pitchFamily="34" charset="0"/>
+                <a:ea typeface="Yu Gothic" pitchFamily="34" charset="-122"/>
+                <a:cs typeface="Yu Gothic" pitchFamily="34" charset="-120"/>
+              </a:rPr>
+              <a:t>実際の依頼文で1件作ってみる</a:t>
+            </a:r>
+            <a:endParaRPr lang="en-US" sz="1300" dirty="0"/>
+          </a:p>
+        </p:txBody>
+      </p:sp>
+      <p:sp>
+        <p:nvSpPr>
+          <p:cNvPr id="13" name="Shape 11"/>
+          <p:cNvSpPr/>
+          <p:nvPr/>
+        </p:nvSpPr>
+        <p:spPr>
+          <a:xfrm>
+            <a:off x="5873496" y="1234440"/>
+            <a:ext cx="2493264" cy="3108960"/>
+          </a:xfrm>
+          <a:prstGeom prst="roundRect">
+            <a:avLst>
+              <a:gd name="adj" fmla="val 2200"/>
+            </a:avLst>
+          </a:prstGeom>
+          <a:solidFill>
+            <a:srgbClr val="F7F9FC"/>
+          </a:solidFill>
+          <a:ln w="12700">
+            <a:solidFill>
+              <a:srgbClr val="C9DBED"/>
+            </a:solidFill>
+            <a:prstDash val="solid"/>
+          </a:ln>
+        </p:spPr>
+      </p:sp>
+      <p:sp>
+        <p:nvSpPr>
+          <p:cNvPr id="14" name="Shape 12"/>
+          <p:cNvSpPr/>
+          <p:nvPr/>
+        </p:nvSpPr>
+        <p:spPr>
+          <a:xfrm>
+            <a:off x="6918960" y="1417320"/>
+            <a:ext cx="402336" cy="402336"/>
+          </a:xfrm>
+          <a:prstGeom prst="ellipse">
+            <a:avLst/>
+          </a:prstGeom>
+          <a:solidFill>
+            <a:srgbClr val="0B5CAB"/>
+          </a:solidFill>
+          <a:ln/>
+        </p:spPr>
+      </p:sp>
+      <p:sp>
+        <p:nvSpPr>
+          <p:cNvPr id="15" name="Text 13"/>
+          <p:cNvSpPr/>
+          <p:nvPr/>
+        </p:nvSpPr>
+        <p:spPr>
+          <a:xfrm>
+            <a:off x="6918960" y="1453896"/>
+            <a:ext cx="402336" cy="347472"/>
+          </a:xfrm>
+          <a:prstGeom prst="rect">
+            <a:avLst/>
+          </a:prstGeom>
+          <a:noFill/>
+          <a:ln/>
+        </p:spPr>
+        <p:txBody>
+          <a:bodyPr wrap="square" rtlCol="0" anchor="ctr"/>
+          <a:lstStyle/>
+          <a:p>
+            <a:pPr algn="ctr" indent="0" marL="0">
+              <a:buNone/>
+            </a:pPr>
+            <a:r>
+              <a:rPr lang="en-US" sz="1200" b="1" dirty="0">
+                <a:solidFill>
+                  <a:srgbClr val="FFFFFF"/>
+                </a:solidFill>
+                <a:latin typeface="Yu Gothic" pitchFamily="34" charset="0"/>
+                <a:ea typeface="Yu Gothic" pitchFamily="34" charset="-122"/>
+                <a:cs typeface="Yu Gothic" pitchFamily="34" charset="-120"/>
+              </a:rPr>
+              <a:t>3</a:t>
+            </a:r>
+            <a:endParaRPr lang="en-US" sz="1200" dirty="0"/>
+          </a:p>
+        </p:txBody>
+      </p:sp>
+      <p:sp>
+        <p:nvSpPr>
+          <p:cNvPr id="16" name="Text 14"/>
+          <p:cNvSpPr/>
+          <p:nvPr/>
+        </p:nvSpPr>
+        <p:spPr>
+          <a:xfrm>
+            <a:off x="5964936" y="1965960"/>
+            <a:ext cx="2310384" cy="2194560"/>
+          </a:xfrm>
+          <a:prstGeom prst="rect">
+            <a:avLst/>
+          </a:prstGeom>
+          <a:noFill/>
+          <a:ln/>
+        </p:spPr>
+        <p:txBody>
+          <a:bodyPr wrap="square" rtlCol="0" anchor="t"/>
+          <a:lstStyle/>
+          <a:p>
+            <a:pPr algn="ctr" indent="0" marL="0">
+              <a:buNone/>
+            </a:pPr>
+            <a:r>
+              <a:rPr lang="en-US" sz="1300" dirty="0">
+                <a:solidFill>
+                  <a:srgbClr val="1A1A1A"/>
+                </a:solidFill>
+                <a:latin typeface="Yu Gothic" pitchFamily="34" charset="0"/>
+                <a:ea typeface="Yu Gothic" pitchFamily="34" charset="-122"/>
+                <a:cs typeface="Yu Gothic" pitchFamily="34" charset="-120"/>
+              </a:rPr>
+              <a:t>必要ならテンプレやトーンを記憶させる</a:t>
+            </a:r>
+            <a:endParaRPr lang="en-US" sz="1300" dirty="0"/>
+          </a:p>
+        </p:txBody>
+      </p:sp>
+    </p:spTree>
+  </p:cSld>
+  <p:clrMapOvr>
+    <a:masterClrMapping/>
+  </p:clrMapOvr>
+</p:sld>
+</file>
+
+<file path=ppt/slides/slide11.xml><?xml version="1.0" encoding="utf-8"?>
+<p:sld xmlns:a="http://schemas.openxmlformats.org/drawingml/2006/main" xmlns:r="http://schemas.openxmlformats.org/officeDocument/2006/relationships" xmlns:p="http://schemas.openxmlformats.org/presentationml/2006/main">
+  <p:cSld name="Slide 11">
+    <p:spTree>
+      <p:nvGrpSpPr>
+        <p:cNvPr id="1" name=""/>
+        <p:cNvGrpSpPr/>
+        <p:nvPr/>
+      </p:nvGrpSpPr>
+      <p:grpSpPr>
+        <a:xfrm>
+          <a:off x="0" y="0"/>
+          <a:ext cx="0" cy="0"/>
+          <a:chOff x="0" y="0"/>
+          <a:chExt cx="0" cy="0"/>
+        </a:xfrm>
+      </p:grpSpPr>
+      <p:sp>
+        <p:nvSpPr>
+          <p:cNvPr id="2" name="Shape 0"/>
+          <p:cNvSpPr/>
+          <p:nvPr/>
+        </p:nvSpPr>
+        <p:spPr>
+          <a:xfrm>
+            <a:off x="0" y="0"/>
+            <a:ext cx="201168" cy="5143500"/>
+          </a:xfrm>
+          <a:prstGeom prst="rect">
+            <a:avLst/>
+          </a:prstGeom>
+          <a:solidFill>
+            <a:srgbClr val="0B5CAB"/>
+          </a:solidFill>
+          <a:ln/>
+        </p:spPr>
+      </p:sp>
+      <p:sp>
+        <p:nvSpPr>
+          <p:cNvPr id="3" name="Text 1"/>
+          <p:cNvSpPr/>
+          <p:nvPr/>
+        </p:nvSpPr>
+        <p:spPr>
+          <a:xfrm>
+            <a:off x="502920" y="320040"/>
+            <a:ext cx="8046720" cy="640080"/>
+          </a:xfrm>
+          <a:prstGeom prst="rect">
+            <a:avLst/>
+          </a:prstGeom>
+          <a:noFill/>
+          <a:ln/>
+        </p:spPr>
+        <p:txBody>
+          <a:bodyPr wrap="square" rtlCol="0" anchor="ctr"/>
+          <a:lstStyle/>
+          <a:p>
+            <a:pPr indent="0" marL="0">
+              <a:buNone/>
+            </a:pPr>
+            <a:r>
+              <a:rPr lang="en-US" sz="2400" b="1" dirty="0">
+                <a:solidFill>
+                  <a:srgbClr val="0B5CAB"/>
+                </a:solidFill>
+                <a:latin typeface="Yu Gothic" pitchFamily="34" charset="0"/>
+                <a:ea typeface="Yu Gothic" pitchFamily="34" charset="-122"/>
+                <a:cs typeface="Yu Gothic" pitchFamily="34" charset="-120"/>
+              </a:rPr>
+              <a:t>まとめ</a:t>
+            </a:r>
+            <a:endParaRPr lang="en-US" sz="2400" dirty="0"/>
+          </a:p>
+        </p:txBody>
+      </p:sp>
+      <p:sp>
+        <p:nvSpPr>
+          <p:cNvPr id="4" name="Shape 2"/>
+          <p:cNvSpPr/>
+          <p:nvPr/>
+        </p:nvSpPr>
+        <p:spPr>
+          <a:xfrm>
+            <a:off x="502920" y="960120"/>
+            <a:ext cx="8046720" cy="0"/>
+          </a:xfrm>
+          <a:prstGeom prst="line">
+            <a:avLst/>
+          </a:prstGeom>
+          <a:noFill/>
+          <a:ln w="25400">
+            <a:solidFill>
+              <a:srgbClr val="C9DBED"/>
+            </a:solidFill>
+            <a:prstDash val="solid"/>
+          </a:ln>
+        </p:spPr>
+      </p:sp>
+      <p:sp>
+        <p:nvSpPr>
+          <p:cNvPr id="5" name="Text 3"/>
+          <p:cNvSpPr/>
+          <p:nvPr/>
+        </p:nvSpPr>
+        <p:spPr>
+          <a:xfrm>
+            <a:off x="594360" y="1234440"/>
+            <a:ext cx="7772400" cy="3474720"/>
+          </a:xfrm>
+          <a:prstGeom prst="rect">
+            <a:avLst/>
+          </a:prstGeom>
+          <a:noFill/>
+          <a:ln/>
+        </p:spPr>
+        <p:txBody>
+          <a:bodyPr wrap="square" rtlCol="0" anchor="t"/>
+          <a:lstStyle/>
+          <a:p>
+            <a:pPr marL="342900" indent="-342900">
+              <a:spcAft>
+                <a:spcPts val="1000"/>
+              </a:spcAft>
+              <a:buSzPct val="100000"/>
+              <a:buChar char="•"/>
+            </a:pPr>
+            <a:r>
+              <a:rPr lang="en-US" sz="1600" dirty="0">
+                <a:solidFill>
+                  <a:srgbClr val="1A1A1A"/>
+                </a:solidFill>
+                <a:latin typeface="Yu Gothic" pitchFamily="34" charset="0"/>
+                <a:ea typeface="Yu Gothic" pitchFamily="34" charset="-122"/>
+                <a:cs typeface="Yu Gothic" pitchFamily="34" charset="-120"/>
+              </a:rPr>
+              <a:t>課題：資料作成に毎回時間がかかる</a:t>
+            </a:r>
+            <a:endParaRPr lang="en-US" sz="1600" dirty="0"/>
+          </a:p>
+          <a:p>
+            <a:pPr marL="342900" indent="-342900">
+              <a:spcAft>
+                <a:spcPts val="1000"/>
+              </a:spcAft>
+              <a:buSzPct val="100000"/>
+              <a:buChar char="•"/>
+            </a:pPr>
+            <a:r>
+              <a:rPr lang="en-US" sz="1600" dirty="0">
+                <a:solidFill>
+                  <a:srgbClr val="1A1A1A"/>
+                </a:solidFill>
+                <a:latin typeface="Yu Gothic" pitchFamily="34" charset="0"/>
+                <a:ea typeface="Yu Gothic" pitchFamily="34" charset="-122"/>
+                <a:cs typeface="Yu Gothic" pitchFamily="34" charset="-120"/>
+              </a:rPr>
+              <a:t>提案：依頼文からスライド構成まで一気に用意する</a:t>
+            </a:r>
+            <a:endParaRPr lang="en-US" sz="1600" dirty="0"/>
+          </a:p>
+          <a:p>
+            <a:pPr marL="342900" indent="-342900">
+              <a:spcAft>
+                <a:spcPts val="1000"/>
+              </a:spcAft>
+              <a:buSzPct val="100000"/>
+              <a:buChar char="•"/>
+            </a:pPr>
+            <a:r>
+              <a:rPr lang="en-US" sz="1600" dirty="0">
+                <a:solidFill>
+                  <a:srgbClr val="1A1A1A"/>
+                </a:solidFill>
+                <a:latin typeface="Yu Gothic" pitchFamily="34" charset="0"/>
+                <a:ea typeface="Yu Gothic" pitchFamily="34" charset="-122"/>
+                <a:cs typeface="Yu Gothic" pitchFamily="34" charset="-120"/>
+              </a:rPr>
+              <a:t>効果</a:t>
+            </a:r>
+            <a:endParaRPr lang="en-US" sz="1600" dirty="0"/>
+          </a:p>
+          <a:p>
+            <a:pPr marL="342900" indent="-342900">
+              <a:spcAft>
+                <a:spcPts val="1000"/>
+              </a:spcAft>
+              <a:buSzPct val="100000"/>
+              <a:buChar char="•"/>
+            </a:pPr>
+            <a:r>
+              <a:rPr lang="en-US" sz="1600" dirty="0">
+                <a:solidFill>
+                  <a:srgbClr val="1A1A1A"/>
+                </a:solidFill>
+                <a:latin typeface="Yu Gothic" pitchFamily="34" charset="0"/>
+                <a:ea typeface="Yu Gothic" pitchFamily="34" charset="-122"/>
+                <a:cs typeface="Yu Gothic" pitchFamily="34" charset="-120"/>
+              </a:rPr>
+              <a:t>次のアクション：見本ファイルをダウンロードして開く</a:t>
+            </a:r>
+            <a:endParaRPr lang="en-US" sz="1600" dirty="0"/>
+          </a:p>
+        </p:txBody>
+      </p:sp>
+    </p:spTree>
+  </p:cSld>
+  <p:clrMapOvr>
+    <a:masterClrMapping/>
+  </p:clrMapOvr>
+</p:sld>
+</file>
+
+<file path=ppt/slides/slide12.xml><?xml version="1.0" encoding="utf-8"?>
+<p:sld xmlns:a="http://schemas.openxmlformats.org/drawingml/2006/main" xmlns:r="http://schemas.openxmlformats.org/officeDocument/2006/relationships" xmlns:p="http://schemas.openxmlformats.org/presentationml/2006/main">
+  <p:cSld name="Slide 12">
+    <p:spTree>
+      <p:nvGrpSpPr>
+        <p:cNvPr id="1" name=""/>
+        <p:cNvGrpSpPr/>
+        <p:nvPr/>
+      </p:nvGrpSpPr>
+      <p:grpSpPr>
+        <a:xfrm>
+          <a:off x="0" y="0"/>
+          <a:ext cx="0" cy="0"/>
+          <a:chOff x="0" y="0"/>
+          <a:chExt cx="0" cy="0"/>
+        </a:xfrm>
+      </p:grpSpPr>
+      <p:sp>
+        <p:nvSpPr>
+          <p:cNvPr id="2" name="Shape 0"/>
+          <p:cNvSpPr/>
+          <p:nvPr/>
+        </p:nvSpPr>
+        <p:spPr>
+          <a:xfrm>
+            <a:off x="0" y="0"/>
+            <a:ext cx="9144000" cy="5143500"/>
+          </a:xfrm>
+          <a:prstGeom prst="rect">
+            <a:avLst/>
+          </a:prstGeom>
+          <a:solidFill>
+            <a:srgbClr val="0B5CAB"/>
+          </a:solidFill>
+          <a:ln/>
+        </p:spPr>
+      </p:sp>
+      <p:sp>
+        <p:nvSpPr>
+          <p:cNvPr id="3" name="Text 1"/>
+          <p:cNvSpPr/>
+          <p:nvPr/>
+        </p:nvSpPr>
+        <p:spPr>
+          <a:xfrm>
+            <a:off x="640080" y="1645920"/>
+            <a:ext cx="7863840" cy="914400"/>
+          </a:xfrm>
+          <a:prstGeom prst="rect">
+            <a:avLst/>
+          </a:prstGeom>
+          <a:noFill/>
+          <a:ln/>
+        </p:spPr>
+        <p:txBody>
+          <a:bodyPr wrap="square" rtlCol="0" anchor="ctr"/>
+          <a:lstStyle/>
+          <a:p>
+            <a:pPr algn="ctr" indent="0" marL="0">
+              <a:buNone/>
+            </a:pPr>
+            <a:r>
+              <a:rPr lang="en-US" sz="3200" b="1" dirty="0">
+                <a:solidFill>
+                  <a:srgbClr val="FFFFFF"/>
+                </a:solidFill>
+                <a:latin typeface="Yu Gothic" pitchFamily="34" charset="0"/>
+                <a:ea typeface="Yu Gothic" pitchFamily="34" charset="-122"/>
+                <a:cs typeface="Yu Gothic" pitchFamily="34" charset="-120"/>
+              </a:rPr>
+              <a:t>ご相談ください</a:t>
+            </a:r>
+            <a:endParaRPr lang="en-US" sz="3200" dirty="0"/>
+          </a:p>
+        </p:txBody>
+      </p:sp>
+      <p:sp>
+        <p:nvSpPr>
+          <p:cNvPr id="4" name="Text 2"/>
+          <p:cNvSpPr/>
+          <p:nvPr/>
+        </p:nvSpPr>
+        <p:spPr>
+          <a:xfrm>
+            <a:off x="731520" y="2834640"/>
+            <a:ext cx="7680960" cy="731520"/>
+          </a:xfrm>
+          <a:prstGeom prst="rect">
+            <a:avLst/>
+          </a:prstGeom>
+          <a:noFill/>
+          <a:ln/>
+        </p:spPr>
+        <p:txBody>
+          <a:bodyPr wrap="square" rtlCol="0" anchor="ctr"/>
+          <a:lstStyle/>
+          <a:p>
+            <a:pPr algn="ctr" indent="0" marL="0">
+              <a:buNone/>
+            </a:pPr>
+            <a:r>
+              <a:rPr lang="en-US" sz="1600" dirty="0">
+                <a:solidFill>
+                  <a:srgbClr val="C9DBED"/>
+                </a:solidFill>
+                <a:latin typeface="Yu Gothic" pitchFamily="34" charset="0"/>
+                <a:ea typeface="Yu Gothic" pitchFamily="34" charset="-122"/>
+                <a:cs typeface="Yu Gothic" pitchFamily="34" charset="-120"/>
+              </a:rPr>
+              <a:t>営業提案スライド（見本）</a:t>
+            </a:r>
+            <a:endParaRPr lang="en-US" sz="1600" dirty="0"/>
+          </a:p>
+        </p:txBody>
+      </p:sp>
+    </p:spTree>
+  </p:cSld>
+  <p:clrMapOvr>
+    <a:masterClrMapping/>
+  </p:clrMapOvr>
+</p:sld>
+</file>
+
+<file path=ppt/slides/slide2.xml><?xml version="1.0" encoding="utf-8"?>
+<p:sld xmlns:a="http://schemas.openxmlformats.org/drawingml/2006/main" xmlns:r="http://schemas.openxmlformats.org/officeDocument/2006/relationships" xmlns:p="http://schemas.openxmlformats.org/presentationml/2006/main">
+  <p:cSld name="Slide 2">
+    <p:spTree>
+      <p:nvGrpSpPr>
+        <p:cNvPr id="1" name=""/>
+        <p:cNvGrpSpPr/>
+        <p:nvPr/>
+      </p:nvGrpSpPr>
+      <p:grpSpPr>
+        <a:xfrm>
+          <a:off x="0" y="0"/>
+          <a:ext cx="0" cy="0"/>
+          <a:chOff x="0" y="0"/>
+          <a:chExt cx="0" cy="0"/>
+        </a:xfrm>
+      </p:grpSpPr>
+      <p:sp>
+        <p:nvSpPr>
+          <p:cNvPr id="2" name="Shape 0"/>
+          <p:cNvSpPr/>
+          <p:nvPr/>
+        </p:nvSpPr>
+        <p:spPr>
+          <a:xfrm>
+            <a:off x="0" y="0"/>
+            <a:ext cx="201168" cy="5143500"/>
+          </a:xfrm>
+          <a:prstGeom prst="rect">
+            <a:avLst/>
+          </a:prstGeom>
+          <a:solidFill>
+            <a:srgbClr val="0B5CAB"/>
+          </a:solidFill>
+          <a:ln/>
+        </p:spPr>
+      </p:sp>
+      <p:sp>
+        <p:nvSpPr>
+          <p:cNvPr id="3" name="Text 1"/>
+          <p:cNvSpPr/>
+          <p:nvPr/>
+        </p:nvSpPr>
+        <p:spPr>
+          <a:xfrm>
+            <a:off x="502920" y="320040"/>
+            <a:ext cx="8046720" cy="640080"/>
+          </a:xfrm>
+          <a:prstGeom prst="rect">
+            <a:avLst/>
+          </a:prstGeom>
+          <a:noFill/>
+          <a:ln/>
+        </p:spPr>
+        <p:txBody>
+          <a:bodyPr wrap="square" rtlCol="0" anchor="ctr"/>
+          <a:lstStyle/>
+          <a:p>
+            <a:pPr indent="0" marL="0">
+              <a:buNone/>
+            </a:pPr>
+            <a:r>
+              <a:rPr lang="en-US" sz="2400" b="1" dirty="0">
+                <a:solidFill>
+                  <a:srgbClr val="0B5CAB"/>
+                </a:solidFill>
+                <a:latin typeface="Yu Gothic" pitchFamily="34" charset="0"/>
+                <a:ea typeface="Yu Gothic" pitchFamily="34" charset="-122"/>
+                <a:cs typeface="Yu Gothic" pitchFamily="34" charset="-120"/>
+              </a:rPr>
+              <a:t>本日の流れ</a:t>
+            </a:r>
+            <a:endParaRPr lang="en-US" sz="2400" dirty="0"/>
+          </a:p>
+        </p:txBody>
+      </p:sp>
+      <p:sp>
+        <p:nvSpPr>
+          <p:cNvPr id="4" name="Shape 2"/>
+          <p:cNvSpPr/>
+          <p:nvPr/>
+        </p:nvSpPr>
+        <p:spPr>
+          <a:xfrm>
+            <a:off x="502920" y="960120"/>
+            <a:ext cx="8046720" cy="0"/>
+          </a:xfrm>
+          <a:prstGeom prst="line">
+            <a:avLst/>
+          </a:prstGeom>
+          <a:noFill/>
+          <a:ln w="25400">
+            <a:solidFill>
+              <a:srgbClr val="C9DBED"/>
+            </a:solidFill>
+            <a:prstDash val="solid"/>
+          </a:ln>
+        </p:spPr>
+      </p:sp>
+      <p:sp>
+        <p:nvSpPr>
+          <p:cNvPr id="5" name="Text 3"/>
+          <p:cNvSpPr/>
+          <p:nvPr/>
+        </p:nvSpPr>
+        <p:spPr>
+          <a:xfrm>
+            <a:off x="594360" y="1234440"/>
+            <a:ext cx="7772400" cy="3474720"/>
+          </a:xfrm>
+          <a:prstGeom prst="rect">
+            <a:avLst/>
+          </a:prstGeom>
+          <a:noFill/>
+          <a:ln/>
+        </p:spPr>
+        <p:txBody>
+          <a:bodyPr wrap="square" rtlCol="0" anchor="t"/>
+          <a:lstStyle/>
+          <a:p>
+            <a:pPr marL="342900" indent="-342900">
+              <a:spcAft>
+                <a:spcPts val="1000"/>
+              </a:spcAft>
+              <a:buSzPct val="100000"/>
+              <a:buChar char="•"/>
+            </a:pPr>
+            <a:r>
+              <a:rPr lang="en-US" sz="1600" dirty="0">
+                <a:solidFill>
+                  <a:srgbClr val="1A1A1A"/>
+                </a:solidFill>
+                <a:latin typeface="Yu Gothic" pitchFamily="34" charset="0"/>
+                <a:ea typeface="Yu Gothic" pitchFamily="34" charset="-122"/>
+                <a:cs typeface="Yu Gothic" pitchFamily="34" charset="-120"/>
+              </a:rPr>
+              <a:t>課題</a:t>
+            </a:r>
+            <a:endParaRPr lang="en-US" sz="1600" dirty="0"/>
+          </a:p>
+          <a:p>
+            <a:pPr marL="342900" indent="-342900">
+              <a:spcAft>
+                <a:spcPts val="1000"/>
+              </a:spcAft>
+              <a:buSzPct val="100000"/>
+              <a:buChar char="•"/>
+            </a:pPr>
+            <a:r>
+              <a:rPr lang="en-US" sz="1600" dirty="0">
+                <a:solidFill>
+                  <a:srgbClr val="1A1A1A"/>
+                </a:solidFill>
+                <a:latin typeface="Yu Gothic" pitchFamily="34" charset="0"/>
+                <a:ea typeface="Yu Gothic" pitchFamily="34" charset="-122"/>
+                <a:cs typeface="Yu Gothic" pitchFamily="34" charset="-120"/>
+              </a:rPr>
+              <a:t>提案</a:t>
+            </a:r>
+            <a:endParaRPr lang="en-US" sz="1600" dirty="0"/>
+          </a:p>
+          <a:p>
+            <a:pPr marL="342900" indent="-342900">
+              <a:spcAft>
+                <a:spcPts val="1000"/>
+              </a:spcAft>
+              <a:buSzPct val="100000"/>
+              <a:buChar char="•"/>
+            </a:pPr>
+            <a:r>
+              <a:rPr lang="en-US" sz="1600" dirty="0">
+                <a:solidFill>
+                  <a:srgbClr val="1A1A1A"/>
+                </a:solidFill>
+                <a:latin typeface="Yu Gothic" pitchFamily="34" charset="0"/>
+                <a:ea typeface="Yu Gothic" pitchFamily="34" charset="-122"/>
+                <a:cs typeface="Yu Gothic" pitchFamily="34" charset="-120"/>
+              </a:rPr>
+              <a:t>効果</a:t>
+            </a:r>
+            <a:endParaRPr lang="en-US" sz="1600" dirty="0"/>
+          </a:p>
+          <a:p>
+            <a:pPr marL="342900" indent="-342900">
+              <a:spcAft>
+                <a:spcPts val="1000"/>
+              </a:spcAft>
+              <a:buSzPct val="100000"/>
+              <a:buChar char="•"/>
+            </a:pPr>
+            <a:r>
+              <a:rPr lang="en-US" sz="1600" dirty="0">
+                <a:solidFill>
+                  <a:srgbClr val="1A1A1A"/>
+                </a:solidFill>
+                <a:latin typeface="Yu Gothic" pitchFamily="34" charset="0"/>
+                <a:ea typeface="Yu Gothic" pitchFamily="34" charset="-122"/>
+                <a:cs typeface="Yu Gothic" pitchFamily="34" charset="-120"/>
+              </a:rPr>
+              <a:t>次のアクション</a:t>
+            </a:r>
+            <a:endParaRPr lang="en-US" sz="1600" dirty="0"/>
+          </a:p>
+        </p:txBody>
+      </p:sp>
+    </p:spTree>
+  </p:cSld>
+  <p:clrMapOvr>
+    <a:masterClrMapping/>
+  </p:clrMapOvr>
+</p:sld>
+</file>
+
+<file path=ppt/slides/slide3.xml><?xml version="1.0" encoding="utf-8"?>
+<p:sld xmlns:a="http://schemas.openxmlformats.org/drawingml/2006/main" xmlns:r="http://schemas.openxmlformats.org/officeDocument/2006/relationships" xmlns:p="http://schemas.openxmlformats.org/presentationml/2006/main">
+  <p:cSld name="Slide 3">
+    <p:spTree>
+      <p:nvGrpSpPr>
+        <p:cNvPr id="1" name=""/>
+        <p:cNvGrpSpPr/>
+        <p:nvPr/>
+      </p:nvGrpSpPr>
+      <p:grpSpPr>
+        <a:xfrm>
+          <a:off x="0" y="0"/>
+          <a:ext cx="0" cy="0"/>
+          <a:chOff x="0" y="0"/>
+          <a:chExt cx="0" cy="0"/>
+        </a:xfrm>
+      </p:grpSpPr>
+      <p:sp>
+        <p:nvSpPr>
+          <p:cNvPr id="2" name="Shape 0"/>
+          <p:cNvSpPr/>
+          <p:nvPr/>
+        </p:nvSpPr>
+        <p:spPr>
+          <a:xfrm>
+            <a:off x="0" y="0"/>
+            <a:ext cx="411480" cy="5143500"/>
+          </a:xfrm>
+          <a:prstGeom prst="rect">
+            <a:avLst/>
+          </a:prstGeom>
+          <a:solidFill>
+            <a:srgbClr val="0B5CAB"/>
+          </a:solidFill>
+          <a:ln/>
+        </p:spPr>
+      </p:sp>
+      <p:sp>
+        <p:nvSpPr>
+          <p:cNvPr id="3" name="Text 1"/>
+          <p:cNvSpPr/>
+          <p:nvPr/>
+        </p:nvSpPr>
+        <p:spPr>
+          <a:xfrm>
+            <a:off x="731520" y="2103120"/>
+            <a:ext cx="7680960" cy="914400"/>
+          </a:xfrm>
+          <a:prstGeom prst="rect">
+            <a:avLst/>
+          </a:prstGeom>
+          <a:noFill/>
+          <a:ln/>
+        </p:spPr>
+        <p:txBody>
+          <a:bodyPr wrap="square" rtlCol="0" anchor="ctr"/>
+          <a:lstStyle/>
+          <a:p>
+            <a:pPr algn="l" indent="0" marL="0">
+              <a:buNone/>
+            </a:pPr>
+            <a:r>
+              <a:rPr lang="en-US" sz="3200" b="1" dirty="0">
+                <a:solidFill>
+                  <a:srgbClr val="0B5CAB"/>
+                </a:solidFill>
+                <a:latin typeface="Yu Gothic" pitchFamily="34" charset="0"/>
+                <a:ea typeface="Yu Gothic" pitchFamily="34" charset="-122"/>
+                <a:cs typeface="Yu Gothic" pitchFamily="34" charset="-120"/>
+              </a:rPr>
+              <a:t>課題</a:t>
+            </a:r>
+            <a:endParaRPr lang="en-US" sz="3200" dirty="0"/>
+          </a:p>
+        </p:txBody>
+      </p:sp>
+    </p:spTree>
+  </p:cSld>
+  <p:clrMapOvr>
+    <a:masterClrMapping/>
+  </p:clrMapOvr>
+</p:sld>
+</file>
+
+<file path=ppt/slides/slide4.xml><?xml version="1.0" encoding="utf-8"?>
+<p:sld xmlns:a="http://schemas.openxmlformats.org/drawingml/2006/main" xmlns:r="http://schemas.openxmlformats.org/officeDocument/2006/relationships" xmlns:p="http://schemas.openxmlformats.org/presentationml/2006/main">
+  <p:cSld name="Slide 4">
+    <p:spTree>
+      <p:nvGrpSpPr>
+        <p:cNvPr id="1" name=""/>
+        <p:cNvGrpSpPr/>
+        <p:nvPr/>
+      </p:nvGrpSpPr>
+      <p:grpSpPr>
+        <a:xfrm>
+          <a:off x="0" y="0"/>
+          <a:ext cx="0" cy="0"/>
+          <a:chOff x="0" y="0"/>
+          <a:chExt cx="0" cy="0"/>
+        </a:xfrm>
+      </p:grpSpPr>
+      <p:sp>
+        <p:nvSpPr>
+          <p:cNvPr id="2" name="Shape 0"/>
+          <p:cNvSpPr/>
+          <p:nvPr/>
+        </p:nvSpPr>
+        <p:spPr>
+          <a:xfrm>
+            <a:off x="0" y="0"/>
+            <a:ext cx="201168" cy="5143500"/>
+          </a:xfrm>
+          <a:prstGeom prst="rect">
+            <a:avLst/>
+          </a:prstGeom>
+          <a:solidFill>
+            <a:srgbClr val="0B5CAB"/>
+          </a:solidFill>
+          <a:ln/>
+        </p:spPr>
+      </p:sp>
+      <p:sp>
+        <p:nvSpPr>
+          <p:cNvPr id="3" name="Text 1"/>
+          <p:cNvSpPr/>
+          <p:nvPr/>
+        </p:nvSpPr>
+        <p:spPr>
+          <a:xfrm>
+            <a:off x="502920" y="320040"/>
+            <a:ext cx="8046720" cy="640080"/>
+          </a:xfrm>
+          <a:prstGeom prst="rect">
+            <a:avLst/>
+          </a:prstGeom>
+          <a:noFill/>
+          <a:ln/>
+        </p:spPr>
+        <p:txBody>
+          <a:bodyPr wrap="square" rtlCol="0" anchor="ctr"/>
+          <a:lstStyle/>
+          <a:p>
+            <a:pPr indent="0" marL="0">
+              <a:buNone/>
+            </a:pPr>
+            <a:r>
+              <a:rPr lang="en-US" sz="2400" b="1" dirty="0">
+                <a:solidFill>
+                  <a:srgbClr val="0B5CAB"/>
+                </a:solidFill>
+                <a:latin typeface="Yu Gothic" pitchFamily="34" charset="0"/>
+                <a:ea typeface="Yu Gothic" pitchFamily="34" charset="-122"/>
+                <a:cs typeface="Yu Gothic" pitchFamily="34" charset="-120"/>
+              </a:rPr>
+              <a:t>課題</a:t>
+            </a:r>
+            <a:endParaRPr lang="en-US" sz="2400" dirty="0"/>
+          </a:p>
+        </p:txBody>
+      </p:sp>
+      <p:sp>
+        <p:nvSpPr>
+          <p:cNvPr id="4" name="Shape 2"/>
+          <p:cNvSpPr/>
+          <p:nvPr/>
+        </p:nvSpPr>
+        <p:spPr>
+          <a:xfrm>
+            <a:off x="502920" y="960120"/>
+            <a:ext cx="8046720" cy="0"/>
+          </a:xfrm>
+          <a:prstGeom prst="line">
+            <a:avLst/>
+          </a:prstGeom>
+          <a:noFill/>
+          <a:ln w="25400">
+            <a:solidFill>
+              <a:srgbClr val="C9DBED"/>
+            </a:solidFill>
+            <a:prstDash val="solid"/>
+          </a:ln>
+        </p:spPr>
+      </p:sp>
+      <p:sp>
+        <p:nvSpPr>
+          <p:cNvPr id="5" name="Text 3"/>
+          <p:cNvSpPr/>
+          <p:nvPr/>
+        </p:nvSpPr>
+        <p:spPr>
+          <a:xfrm>
+            <a:off x="594360" y="1234440"/>
+            <a:ext cx="7772400" cy="3474720"/>
+          </a:xfrm>
+          <a:prstGeom prst="rect">
+            <a:avLst/>
+          </a:prstGeom>
+          <a:noFill/>
+          <a:ln/>
+        </p:spPr>
+        <p:txBody>
+          <a:bodyPr wrap="square" rtlCol="0" anchor="t"/>
+          <a:lstStyle/>
+          <a:p>
+            <a:pPr marL="342900" indent="-342900">
+              <a:spcAft>
+                <a:spcPts val="1000"/>
+              </a:spcAft>
+              <a:buSzPct val="100000"/>
+              <a:buChar char="•"/>
+            </a:pPr>
+            <a:r>
+              <a:rPr lang="en-US" sz="1600" dirty="0">
+                <a:solidFill>
+                  <a:srgbClr val="1A1A1A"/>
+                </a:solidFill>
+                <a:latin typeface="Yu Gothic" pitchFamily="34" charset="0"/>
+                <a:ea typeface="Yu Gothic" pitchFamily="34" charset="-122"/>
+                <a:cs typeface="Yu Gothic" pitchFamily="34" charset="-120"/>
+              </a:rPr>
+              <a:t>資料作成に毎回時間がかかる</a:t>
+            </a:r>
+            <a:endParaRPr lang="en-US" sz="1600" dirty="0"/>
+          </a:p>
+          <a:p>
+            <a:pPr marL="342900" indent="-342900">
+              <a:spcAft>
+                <a:spcPts val="1000"/>
+              </a:spcAft>
+              <a:buSzPct val="100000"/>
+              <a:buChar char="•"/>
+            </a:pPr>
+            <a:r>
+              <a:rPr lang="en-US" sz="1600" dirty="0">
+                <a:solidFill>
+                  <a:srgbClr val="1A1A1A"/>
+                </a:solidFill>
+                <a:latin typeface="Yu Gothic" pitchFamily="34" charset="0"/>
+                <a:ea typeface="Yu Gothic" pitchFamily="34" charset="-122"/>
+                <a:cs typeface="Yu Gothic" pitchFamily="34" charset="-120"/>
+              </a:rPr>
+              <a:t>構成が担当者ごとにばらつく</a:t>
+            </a:r>
+            <a:endParaRPr lang="en-US" sz="1600" dirty="0"/>
+          </a:p>
+          <a:p>
+            <a:pPr marL="342900" indent="-342900">
+              <a:spcAft>
+                <a:spcPts val="1000"/>
+              </a:spcAft>
+              <a:buSzPct val="100000"/>
+              <a:buChar char="•"/>
+            </a:pPr>
+            <a:r>
+              <a:rPr lang="en-US" sz="1600" dirty="0">
+                <a:solidFill>
+                  <a:srgbClr val="1A1A1A"/>
+                </a:solidFill>
+                <a:latin typeface="Yu Gothic" pitchFamily="34" charset="0"/>
+                <a:ea typeface="Yu Gothic" pitchFamily="34" charset="-122"/>
+                <a:cs typeface="Yu Gothic" pitchFamily="34" charset="-120"/>
+              </a:rPr>
+              <a:t>確認前に形が揃わない</a:t>
+            </a:r>
+            <a:endParaRPr lang="en-US" sz="1600" dirty="0"/>
+          </a:p>
+        </p:txBody>
+      </p:sp>
+    </p:spTree>
+  </p:cSld>
+  <p:clrMapOvr>
+    <a:masterClrMapping/>
+  </p:clrMapOvr>
+</p:sld>
+</file>
+
+<file path=ppt/slides/slide5.xml><?xml version="1.0" encoding="utf-8"?>
+<p:sld xmlns:a="http://schemas.openxmlformats.org/drawingml/2006/main" xmlns:r="http://schemas.openxmlformats.org/officeDocument/2006/relationships" xmlns:p="http://schemas.openxmlformats.org/presentationml/2006/main">
+  <p:cSld name="Slide 5">
+    <p:spTree>
+      <p:nvGrpSpPr>
+        <p:cNvPr id="1" name=""/>
+        <p:cNvGrpSpPr/>
+        <p:nvPr/>
+      </p:nvGrpSpPr>
+      <p:grpSpPr>
+        <a:xfrm>
+          <a:off x="0" y="0"/>
+          <a:ext cx="0" cy="0"/>
+          <a:chOff x="0" y="0"/>
+          <a:chExt cx="0" cy="0"/>
+        </a:xfrm>
+      </p:grpSpPr>
+      <p:sp>
+        <p:nvSpPr>
+          <p:cNvPr id="2" name="Shape 0"/>
+          <p:cNvSpPr/>
+          <p:nvPr/>
+        </p:nvSpPr>
+        <p:spPr>
+          <a:xfrm>
+            <a:off x="0" y="0"/>
+            <a:ext cx="411480" cy="5143500"/>
+          </a:xfrm>
+          <a:prstGeom prst="rect">
+            <a:avLst/>
+          </a:prstGeom>
+          <a:solidFill>
+            <a:srgbClr val="0B5CAB"/>
+          </a:solidFill>
+          <a:ln/>
+        </p:spPr>
+      </p:sp>
+      <p:sp>
+        <p:nvSpPr>
+          <p:cNvPr id="3" name="Text 1"/>
+          <p:cNvSpPr/>
+          <p:nvPr/>
+        </p:nvSpPr>
+        <p:spPr>
+          <a:xfrm>
+            <a:off x="731520" y="2103120"/>
+            <a:ext cx="7680960" cy="914400"/>
+          </a:xfrm>
+          <a:prstGeom prst="rect">
+            <a:avLst/>
+          </a:prstGeom>
+          <a:noFill/>
+          <a:ln/>
+        </p:spPr>
+        <p:txBody>
+          <a:bodyPr wrap="square" rtlCol="0" anchor="ctr"/>
+          <a:lstStyle/>
+          <a:p>
+            <a:pPr algn="l" indent="0" marL="0">
+              <a:buNone/>
+            </a:pPr>
+            <a:r>
+              <a:rPr lang="en-US" sz="3200" b="1" dirty="0">
+                <a:solidFill>
+                  <a:srgbClr val="0B5CAB"/>
+                </a:solidFill>
+                <a:latin typeface="Yu Gothic" pitchFamily="34" charset="0"/>
+                <a:ea typeface="Yu Gothic" pitchFamily="34" charset="-122"/>
+                <a:cs typeface="Yu Gothic" pitchFamily="34" charset="-120"/>
+              </a:rPr>
+              <a:t>提案</a:t>
+            </a:r>
+            <a:endParaRPr lang="en-US" sz="3200" dirty="0"/>
+          </a:p>
+        </p:txBody>
+      </p:sp>
+    </p:spTree>
+  </p:cSld>
+  <p:clrMapOvr>
+    <a:masterClrMapping/>
+  </p:clrMapOvr>
+</p:sld>
+</file>
+
+<file path=ppt/slides/slide6.xml><?xml version="1.0" encoding="utf-8"?>
+<p:sld xmlns:a="http://schemas.openxmlformats.org/drawingml/2006/main" xmlns:r="http://schemas.openxmlformats.org/officeDocument/2006/relationships" xmlns:p="http://schemas.openxmlformats.org/presentationml/2006/main">
+  <p:cSld name="Slide 6">
+    <p:spTree>
+      <p:nvGrpSpPr>
+        <p:cNvPr id="1" name=""/>
+        <p:cNvGrpSpPr/>
+        <p:nvPr/>
+      </p:nvGrpSpPr>
+      <p:grpSpPr>
+        <a:xfrm>
+          <a:off x="0" y="0"/>
+          <a:ext cx="0" cy="0"/>
+          <a:chOff x="0" y="0"/>
+          <a:chExt cx="0" cy="0"/>
+        </a:xfrm>
+      </p:grpSpPr>
+      <p:sp>
+        <p:nvSpPr>
+          <p:cNvPr id="2" name="Shape 0"/>
+          <p:cNvSpPr/>
+          <p:nvPr/>
+        </p:nvSpPr>
+        <p:spPr>
+          <a:xfrm>
+            <a:off x="0" y="0"/>
+            <a:ext cx="201168" cy="5143500"/>
+          </a:xfrm>
+          <a:prstGeom prst="rect">
+            <a:avLst/>
+          </a:prstGeom>
+          <a:solidFill>
+            <a:srgbClr val="0B5CAB"/>
+          </a:solidFill>
+          <a:ln/>
+        </p:spPr>
+      </p:sp>
+      <p:sp>
+        <p:nvSpPr>
+          <p:cNvPr id="3" name="Text 1"/>
+          <p:cNvSpPr/>
+          <p:nvPr/>
+        </p:nvSpPr>
+        <p:spPr>
+          <a:xfrm>
+            <a:off x="502920" y="320040"/>
+            <a:ext cx="8046720" cy="640080"/>
+          </a:xfrm>
+          <a:prstGeom prst="rect">
+            <a:avLst/>
+          </a:prstGeom>
+          <a:noFill/>
+          <a:ln/>
+        </p:spPr>
+        <p:txBody>
+          <a:bodyPr wrap="square" rtlCol="0" anchor="ctr"/>
+          <a:lstStyle/>
+          <a:p>
+            <a:pPr indent="0" marL="0">
+              <a:buNone/>
+            </a:pPr>
+            <a:r>
+              <a:rPr lang="en-US" sz="2400" b="1" dirty="0">
+                <a:solidFill>
+                  <a:srgbClr val="0B5CAB"/>
+                </a:solidFill>
+                <a:latin typeface="Yu Gothic" pitchFamily="34" charset="0"/>
+                <a:ea typeface="Yu Gothic" pitchFamily="34" charset="-122"/>
+                <a:cs typeface="Yu Gothic" pitchFamily="34" charset="-120"/>
+              </a:rPr>
+              <a:t>提案</a:t>
+            </a:r>
+            <a:endParaRPr lang="en-US" sz="2400" dirty="0"/>
+          </a:p>
+        </p:txBody>
+      </p:sp>
+      <p:sp>
+        <p:nvSpPr>
+          <p:cNvPr id="4" name="Shape 2"/>
+          <p:cNvSpPr/>
+          <p:nvPr/>
+        </p:nvSpPr>
+        <p:spPr>
+          <a:xfrm>
+            <a:off x="502920" y="960120"/>
+            <a:ext cx="8046720" cy="0"/>
+          </a:xfrm>
+          <a:prstGeom prst="line">
+            <a:avLst/>
+          </a:prstGeom>
+          <a:noFill/>
+          <a:ln w="25400">
+            <a:solidFill>
+              <a:srgbClr val="C9DBED"/>
+            </a:solidFill>
+            <a:prstDash val="solid"/>
+          </a:ln>
+        </p:spPr>
+      </p:sp>
+      <p:sp>
+        <p:nvSpPr>
+          <p:cNvPr id="5" name="Text 3"/>
+          <p:cNvSpPr/>
+          <p:nvPr/>
+        </p:nvSpPr>
+        <p:spPr>
+          <a:xfrm>
+            <a:off x="594360" y="1234440"/>
+            <a:ext cx="7772400" cy="3474720"/>
+          </a:xfrm>
+          <a:prstGeom prst="rect">
+            <a:avLst/>
+          </a:prstGeom>
+          <a:noFill/>
+          <a:ln/>
+        </p:spPr>
+        <p:txBody>
+          <a:bodyPr wrap="square" rtlCol="0" anchor="t"/>
+          <a:lstStyle/>
+          <a:p>
+            <a:pPr marL="342900" indent="-342900">
+              <a:spcAft>
+                <a:spcPts val="1000"/>
+              </a:spcAft>
+              <a:buSzPct val="100000"/>
+              <a:buChar char="•"/>
+            </a:pPr>
+            <a:r>
+              <a:rPr lang="en-US" sz="1600" dirty="0">
+                <a:solidFill>
+                  <a:srgbClr val="1A1A1A"/>
+                </a:solidFill>
+                <a:latin typeface="Yu Gothic" pitchFamily="34" charset="0"/>
+                <a:ea typeface="Yu Gothic" pitchFamily="34" charset="-122"/>
+                <a:cs typeface="Yu Gothic" pitchFamily="34" charset="-120"/>
+              </a:rPr>
+              <a:t>依頼文からスライド構成まで一気に用意する</a:t>
+            </a:r>
+            <a:endParaRPr lang="en-US" sz="1600" dirty="0"/>
+          </a:p>
+          <a:p>
+            <a:pPr marL="342900" indent="-342900">
+              <a:spcAft>
+                <a:spcPts val="1000"/>
+              </a:spcAft>
+              <a:buSzPct val="100000"/>
+              <a:buChar char="•"/>
+            </a:pPr>
+            <a:r>
+              <a:rPr lang="en-US" sz="1600" dirty="0">
+                <a:solidFill>
+                  <a:srgbClr val="1A1A1A"/>
+                </a:solidFill>
+                <a:latin typeface="Yu Gothic" pitchFamily="34" charset="0"/>
+                <a:ea typeface="Yu Gothic" pitchFamily="34" charset="-122"/>
+                <a:cs typeface="Yu Gothic" pitchFamily="34" charset="-120"/>
+              </a:rPr>
+              <a:t>目的・課題・提案・効果・次のアクションを固定順で揃える</a:t>
+            </a:r>
+            <a:endParaRPr lang="en-US" sz="1600" dirty="0"/>
+          </a:p>
+          <a:p>
+            <a:pPr marL="342900" indent="-342900">
+              <a:spcAft>
+                <a:spcPts val="1000"/>
+              </a:spcAft>
+              <a:buSzPct val="100000"/>
+              <a:buChar char="•"/>
+            </a:pPr>
+            <a:r>
+              <a:rPr lang="en-US" sz="1600" dirty="0">
+                <a:solidFill>
+                  <a:srgbClr val="1A1A1A"/>
+                </a:solidFill>
+                <a:latin typeface="Yu Gothic" pitchFamily="34" charset="0"/>
+                <a:ea typeface="Yu Gothic" pitchFamily="34" charset="-122"/>
+                <a:cs typeface="Yu Gothic" pitchFamily="34" charset="-120"/>
+              </a:rPr>
+              <a:t>完成ファイル（.pptx）をそのまま共有できる</a:t>
+            </a:r>
+            <a:endParaRPr lang="en-US" sz="1600" dirty="0"/>
+          </a:p>
+        </p:txBody>
+      </p:sp>
+    </p:spTree>
+  </p:cSld>
+  <p:clrMapOvr>
+    <a:masterClrMapping/>
+  </p:clrMapOvr>
+</p:sld>
+</file>
+
+<file path=ppt/slides/slide7.xml><?xml version="1.0" encoding="utf-8"?>
+<p:sld xmlns:a="http://schemas.openxmlformats.org/drawingml/2006/main" xmlns:r="http://schemas.openxmlformats.org/officeDocument/2006/relationships" xmlns:p="http://schemas.openxmlformats.org/presentationml/2006/main">
+  <p:cSld name="Slide 7">
+    <p:spTree>
+      <p:nvGrpSpPr>
+        <p:cNvPr id="1" name=""/>
+        <p:cNvGrpSpPr/>
+        <p:nvPr/>
+      </p:nvGrpSpPr>
+      <p:grpSpPr>
+        <a:xfrm>
+          <a:off x="0" y="0"/>
+          <a:ext cx="0" cy="0"/>
+          <a:chOff x="0" y="0"/>
+          <a:chExt cx="0" cy="0"/>
+        </a:xfrm>
+      </p:grpSpPr>
+      <p:sp>
+        <p:nvSpPr>
+          <p:cNvPr id="2" name="Shape 0"/>
+          <p:cNvSpPr/>
+          <p:nvPr/>
+        </p:nvSpPr>
+        <p:spPr>
+          <a:xfrm>
+            <a:off x="0" y="0"/>
+            <a:ext cx="411480" cy="5143500"/>
+          </a:xfrm>
+          <a:prstGeom prst="rect">
+            <a:avLst/>
+          </a:prstGeom>
+          <a:solidFill>
+            <a:srgbClr val="0B5CAB"/>
+          </a:solidFill>
+          <a:ln/>
+        </p:spPr>
+      </p:sp>
+      <p:sp>
+        <p:nvSpPr>
+          <p:cNvPr id="3" name="Text 1"/>
+          <p:cNvSpPr/>
+          <p:nvPr/>
+        </p:nvSpPr>
+        <p:spPr>
+          <a:xfrm>
+            <a:off x="731520" y="2103120"/>
+            <a:ext cx="7680960" cy="914400"/>
+          </a:xfrm>
+          <a:prstGeom prst="rect">
+            <a:avLst/>
+          </a:prstGeom>
+          <a:noFill/>
+          <a:ln/>
+        </p:spPr>
+        <p:txBody>
+          <a:bodyPr wrap="square" rtlCol="0" anchor="ctr"/>
+          <a:lstStyle/>
+          <a:p>
+            <a:pPr algn="l" indent="0" marL="0">
+              <a:buNone/>
+            </a:pPr>
+            <a:r>
+              <a:rPr lang="en-US" sz="3200" b="1" dirty="0">
+                <a:solidFill>
+                  <a:srgbClr val="0B5CAB"/>
+                </a:solidFill>
+                <a:latin typeface="Yu Gothic" pitchFamily="34" charset="0"/>
+                <a:ea typeface="Yu Gothic" pitchFamily="34" charset="-122"/>
+                <a:cs typeface="Yu Gothic" pitchFamily="34" charset="-120"/>
+              </a:rPr>
+              <a:t>効果</a:t>
+            </a:r>
+            <a:endParaRPr lang="en-US" sz="3200" dirty="0"/>
+          </a:p>
+        </p:txBody>
+      </p:sp>
+    </p:spTree>
+  </p:cSld>
+  <p:clrMapOvr>
+    <a:masterClrMapping/>
+  </p:clrMapOvr>
+</p:sld>
+</file>
+
+<file path=ppt/slides/slide8.xml><?xml version="1.0" encoding="utf-8"?>
+<p:sld xmlns:a="http://schemas.openxmlformats.org/drawingml/2006/main" xmlns:r="http://schemas.openxmlformats.org/officeDocument/2006/relationships" xmlns:p="http://schemas.openxmlformats.org/presentationml/2006/main">
+  <p:cSld name="Slide 8">
+    <p:spTree>
+      <p:nvGrpSpPr>
+        <p:cNvPr id="1" name=""/>
+        <p:cNvGrpSpPr/>
+        <p:nvPr/>
+      </p:nvGrpSpPr>
+      <p:grpSpPr>
+        <a:xfrm>
+          <a:off x="0" y="0"/>
+          <a:ext cx="0" cy="0"/>
+          <a:chOff x="0" y="0"/>
+          <a:chExt cx="0" cy="0"/>
+        </a:xfrm>
+      </p:grpSpPr>
+      <p:sp>
+        <p:nvSpPr>
+          <p:cNvPr id="2" name="Shape 0"/>
+          <p:cNvSpPr/>
+          <p:nvPr/>
+        </p:nvSpPr>
+        <p:spPr>
+          <a:xfrm>
+            <a:off x="0" y="0"/>
+            <a:ext cx="201168" cy="5143500"/>
+          </a:xfrm>
+          <a:prstGeom prst="rect">
+            <a:avLst/>
+          </a:prstGeom>
+          <a:solidFill>
+            <a:srgbClr val="0B5CAB"/>
+          </a:solidFill>
+          <a:ln/>
+        </p:spPr>
+      </p:sp>
+      <p:sp>
+        <p:nvSpPr>
+          <p:cNvPr id="3" name="Text 1"/>
+          <p:cNvSpPr/>
+          <p:nvPr/>
+        </p:nvSpPr>
+        <p:spPr>
+          <a:xfrm>
+            <a:off x="502920" y="320040"/>
+            <a:ext cx="8046720" cy="640080"/>
+          </a:xfrm>
+          <a:prstGeom prst="rect">
+            <a:avLst/>
+          </a:prstGeom>
+          <a:noFill/>
+          <a:ln/>
+        </p:spPr>
+        <p:txBody>
+          <a:bodyPr wrap="square" rtlCol="0" anchor="ctr"/>
+          <a:lstStyle/>
+          <a:p>
+            <a:pPr indent="0" marL="0">
+              <a:buNone/>
+            </a:pPr>
+            <a:r>
+              <a:rPr lang="en-US" sz="2400" b="1" dirty="0">
+                <a:solidFill>
+                  <a:srgbClr val="0B5CAB"/>
+                </a:solidFill>
+                <a:latin typeface="Yu Gothic" pitchFamily="34" charset="0"/>
+                <a:ea typeface="Yu Gothic" pitchFamily="34" charset="-122"/>
+                <a:cs typeface="Yu Gothic" pitchFamily="34" charset="-120"/>
+              </a:rPr>
+              <a:t>効果</a:t>
+            </a:r>
+            <a:endParaRPr lang="en-US" sz="2400" dirty="0"/>
+          </a:p>
+        </p:txBody>
+      </p:sp>
+      <p:sp>
+        <p:nvSpPr>
+          <p:cNvPr id="4" name="Shape 2"/>
+          <p:cNvSpPr/>
+          <p:nvPr/>
+        </p:nvSpPr>
+        <p:spPr>
+          <a:xfrm>
+            <a:off x="502920" y="960120"/>
+            <a:ext cx="8046720" cy="0"/>
+          </a:xfrm>
+          <a:prstGeom prst="line">
+            <a:avLst/>
+          </a:prstGeom>
+          <a:noFill/>
+          <a:ln w="25400">
+            <a:solidFill>
+              <a:srgbClr val="C9DBED"/>
+            </a:solidFill>
+            <a:prstDash val="solid"/>
+          </a:ln>
+        </p:spPr>
+      </p:sp>
       <p:graphicFrame>
         <p:nvGraphicFramePr>
-          <p:cNvPr id="11" name="Table 0"/>
+          <p:cNvPr id="9" name="Table 0"/>
           <p:cNvGraphicFramePr>
             <a:graphicFrameLocks noGrp="1"/>
           </p:cNvGraphicFramePr>
@@ -2344,20 +3833,20 @@
                         <a:buNone/>
                       </a:pPr>
                       <a:r>
-                        <a:rPr lang="en-US" sz="1200" b="1" dirty="0">
+                        <a:rPr lang="en-US" sz="1300" b="1" dirty="0">
                           <a:solidFill>
                             <a:srgbClr val="FFFFFF"/>
                           </a:solidFill>
-                          <a:latin typeface="Calibri" pitchFamily="34" charset="0"/>
-                          <a:ea typeface="Calibri" pitchFamily="34" charset="-122"/>
-                          <a:cs typeface="Calibri" pitchFamily="34" charset="-120"/>
+                          <a:latin typeface="Yu Gothic" pitchFamily="34" charset="0"/>
+                          <a:ea typeface="Yu Gothic" pitchFamily="34" charset="-122"/>
+                          <a:cs typeface="Yu Gothic" pitchFamily="34" charset="-120"/>
                         </a:rPr>
-                        <a:t>形式</a:t>
+                        <a:t>項目</a:t>
                       </a:r>
-                      <a:endParaRPr lang="en-US" sz="1200" dirty="0">
-                        <a:latin typeface="Calibri" charset="0"/>
-                        <a:ea typeface="Calibri" charset="0"/>
-                        <a:cs typeface="Calibri" charset="0"/>
+                      <a:endParaRPr lang="en-US" sz="1300" dirty="0">
+                        <a:latin typeface="Yu Gothic" charset="0"/>
+                        <a:ea typeface="Yu Gothic" charset="0"/>
+                        <a:cs typeface="Yu Gothic" charset="0"/>
                       </a:endParaRPr>
                     </a:p>
                   </a:txBody>
@@ -2412,20 +3901,20 @@
                         <a:buNone/>
                       </a:pPr>
                       <a:r>
-                        <a:rPr lang="en-US" sz="1200" b="1" dirty="0">
+                        <a:rPr lang="en-US" sz="1300" b="1" dirty="0">
                           <a:solidFill>
                             <a:srgbClr val="FFFFFF"/>
                           </a:solidFill>
-                          <a:latin typeface="Calibri" pitchFamily="34" charset="0"/>
-                          <a:ea typeface="Calibri" pitchFamily="34" charset="-122"/>
-                          <a:cs typeface="Calibri" pitchFamily="34" charset="-120"/>
+                          <a:latin typeface="Yu Gothic" pitchFamily="34" charset="0"/>
+                          <a:ea typeface="Yu Gothic" pitchFamily="34" charset="-122"/>
+                          <a:cs typeface="Yu Gothic" pitchFamily="34" charset="-120"/>
                         </a:rPr>
-                        <a:t>PowerPoint（.pptx）</a:t>
+                        <a:t>内容</a:t>
                       </a:r>
-                      <a:endParaRPr lang="en-US" sz="1200" dirty="0">
-                        <a:latin typeface="Calibri" charset="0"/>
-                        <a:ea typeface="Calibri" charset="0"/>
-                        <a:cs typeface="Calibri" charset="0"/>
+                      <a:endParaRPr lang="en-US" sz="1300" dirty="0">
+                        <a:latin typeface="Yu Gothic" charset="0"/>
+                        <a:ea typeface="Yu Gothic" charset="0"/>
+                        <a:cs typeface="Yu Gothic" charset="0"/>
                       </a:endParaRPr>
                     </a:p>
                   </a:txBody>
@@ -2482,20 +3971,20 @@
                         <a:buNone/>
                       </a:pPr>
                       <a:r>
-                        <a:rPr lang="en-US" sz="1200" dirty="0">
+                        <a:rPr lang="en-US" sz="1300" dirty="0">
                           <a:solidFill>
                             <a:srgbClr val="1A1A1A"/>
                           </a:solidFill>
-                          <a:latin typeface="Calibri" pitchFamily="34" charset="0"/>
-                          <a:ea typeface="Calibri" pitchFamily="34" charset="-122"/>
-                          <a:cs typeface="Calibri" pitchFamily="34" charset="-120"/>
+                          <a:latin typeface="Yu Gothic" pitchFamily="34" charset="0"/>
+                          <a:ea typeface="Yu Gothic" pitchFamily="34" charset="-122"/>
+                          <a:cs typeface="Yu Gothic" pitchFamily="34" charset="-120"/>
                         </a:rPr>
-                        <a:t>用途</a:t>
+                        <a:t>形式</a:t>
                       </a:r>
-                      <a:endParaRPr lang="en-US" sz="1200" dirty="0">
-                        <a:latin typeface="Calibri" charset="0"/>
-                        <a:ea typeface="Calibri" charset="0"/>
-                        <a:cs typeface="Calibri" charset="0"/>
+                      <a:endParaRPr lang="en-US" sz="1300" dirty="0">
+                        <a:latin typeface="Yu Gothic" charset="0"/>
+                        <a:ea typeface="Yu Gothic" charset="0"/>
+                        <a:cs typeface="Yu Gothic" charset="0"/>
                       </a:endParaRPr>
                     </a:p>
                   </a:txBody>
@@ -2547,20 +4036,20 @@
                         <a:buNone/>
                       </a:pPr>
                       <a:r>
-                        <a:rPr lang="en-US" sz="1200" dirty="0">
+                        <a:rPr lang="en-US" sz="1300" dirty="0">
                           <a:solidFill>
                             <a:srgbClr val="1A1A1A"/>
                           </a:solidFill>
-                          <a:latin typeface="Calibri" pitchFamily="34" charset="0"/>
-                          <a:ea typeface="Calibri" pitchFamily="34" charset="-122"/>
-                          <a:cs typeface="Calibri" pitchFamily="34" charset="-120"/>
+                          <a:latin typeface="Yu Gothic" pitchFamily="34" charset="0"/>
+                          <a:ea typeface="Yu Gothic" pitchFamily="34" charset="-122"/>
+                          <a:cs typeface="Yu Gothic" pitchFamily="34" charset="-120"/>
                         </a:rPr>
-                        <a:t>営業・社内説明の見本</a:t>
+                        <a:t>PowerPoint（.pptx）</a:t>
                       </a:r>
-                      <a:endParaRPr lang="en-US" sz="1200" dirty="0">
-                        <a:latin typeface="Calibri" charset="0"/>
-                        <a:ea typeface="Calibri" charset="0"/>
-                        <a:cs typeface="Calibri" charset="0"/>
+                      <a:endParaRPr lang="en-US" sz="1300" dirty="0">
+                        <a:latin typeface="Yu Gothic" charset="0"/>
+                        <a:ea typeface="Yu Gothic" charset="0"/>
+                        <a:cs typeface="Yu Gothic" charset="0"/>
                       </a:endParaRPr>
                     </a:p>
                   </a:txBody>
@@ -2614,20 +4103,20 @@
                         <a:buNone/>
                       </a:pPr>
                       <a:r>
-                        <a:rPr lang="en-US" sz="1200" dirty="0">
+                        <a:rPr lang="en-US" sz="1300" dirty="0">
                           <a:solidFill>
                             <a:srgbClr val="1A1A1A"/>
                           </a:solidFill>
-                          <a:latin typeface="Calibri" pitchFamily="34" charset="0"/>
-                          <a:ea typeface="Calibri" pitchFamily="34" charset="-122"/>
-                          <a:cs typeface="Calibri" pitchFamily="34" charset="-120"/>
+                          <a:latin typeface="Yu Gothic" pitchFamily="34" charset="0"/>
+                          <a:ea typeface="Yu Gothic" pitchFamily="34" charset="-122"/>
+                          <a:cs typeface="Yu Gothic" pitchFamily="34" charset="-120"/>
                         </a:rPr>
-                        <a:t>注意</a:t>
+                        <a:t>用途</a:t>
                       </a:r>
-                      <a:endParaRPr lang="en-US" sz="1200" dirty="0">
-                        <a:latin typeface="Calibri" charset="0"/>
-                        <a:ea typeface="Calibri" charset="0"/>
-                        <a:cs typeface="Calibri" charset="0"/>
+                      <a:endParaRPr lang="en-US" sz="1300" dirty="0">
+                        <a:latin typeface="Yu Gothic" charset="0"/>
+                        <a:ea typeface="Yu Gothic" charset="0"/>
+                        <a:cs typeface="Yu Gothic" charset="0"/>
                       </a:endParaRPr>
                     </a:p>
                   </a:txBody>
@@ -2679,20 +4168,152 @@
                         <a:buNone/>
                       </a:pPr>
                       <a:r>
-                        <a:rPr lang="en-US" sz="1200" dirty="0">
+                        <a:rPr lang="en-US" sz="1300" dirty="0">
                           <a:solidFill>
                             <a:srgbClr val="1A1A1A"/>
                           </a:solidFill>
-                          <a:latin typeface="Calibri" pitchFamily="34" charset="0"/>
-                          <a:ea typeface="Calibri" pitchFamily="34" charset="-122"/>
-                          <a:cs typeface="Calibri" pitchFamily="34" charset="-120"/>
+                          <a:latin typeface="Yu Gothic" pitchFamily="34" charset="0"/>
+                          <a:ea typeface="Yu Gothic" pitchFamily="34" charset="-122"/>
+                          <a:cs typeface="Yu Gothic" pitchFamily="34" charset="-120"/>
+                        </a:rPr>
+                        <a:t>営業・社内説明の見本</a:t>
+                      </a:r>
+                      <a:endParaRPr lang="en-US" sz="1300" dirty="0">
+                        <a:latin typeface="Yu Gothic" charset="0"/>
+                        <a:ea typeface="Yu Gothic" charset="0"/>
+                        <a:cs typeface="Yu Gothic" charset="0"/>
+                      </a:endParaRPr>
+                    </a:p>
+                  </a:txBody>
+                  <a:tcPr marL="91440" marR="91440" marT="45720" marB="45720" anchor="ctr">
+                    <a:lnL w="6350" cap="flat" cmpd="sng" algn="ctr">
+                      <a:solidFill>
+                        <a:srgbClr val="B0B0B0"/>
+                      </a:solidFill>
+                      <a:prstDash val="solid"/>
+                      <a:round/>
+                      <a:headEnd type="none" w="med" len="med"/>
+                      <a:tailEnd type="none" w="med" len="med"/>
+                    </a:lnL>
+                    <a:lnR w="6350" cap="flat" cmpd="sng" algn="ctr">
+                      <a:solidFill>
+                        <a:srgbClr val="B0B0B0"/>
+                      </a:solidFill>
+                      <a:prstDash val="solid"/>
+                      <a:round/>
+                      <a:headEnd type="none" w="med" len="med"/>
+                      <a:tailEnd type="none" w="med" len="med"/>
+                    </a:lnR>
+                    <a:lnT w="6350" cap="flat" cmpd="sng" algn="ctr">
+                      <a:solidFill>
+                        <a:srgbClr val="B0B0B0"/>
+                      </a:solidFill>
+                      <a:prstDash val="solid"/>
+                      <a:round/>
+                      <a:headEnd type="none" w="med" len="med"/>
+                      <a:tailEnd type="none" w="med" len="med"/>
+                    </a:lnT>
+                    <a:lnB w="6350" cap="flat" cmpd="sng" algn="ctr">
+                      <a:solidFill>
+                        <a:srgbClr val="B0B0B0"/>
+                      </a:solidFill>
+                      <a:prstDash val="solid"/>
+                      <a:round/>
+                      <a:headEnd type="none" w="med" len="med"/>
+                      <a:tailEnd type="none" w="med" len="med"/>
+                    </a:lnB>
+                  </a:tcPr>
+                </a:tc>
+              </a:tr>
+              <a:tr h="0">
+                <a:tc>
+                  <a:txBody>
+                    <a:bodyPr/>
+                    <a:lstStyle/>
+                    <a:p>
+                      <a:pPr algn="l" indent="0" marL="0">
+                        <a:buNone/>
+                      </a:pPr>
+                      <a:r>
+                        <a:rPr lang="en-US" sz="1300" dirty="0">
+                          <a:solidFill>
+                            <a:srgbClr val="1A1A1A"/>
+                          </a:solidFill>
+                          <a:latin typeface="Yu Gothic" pitchFamily="34" charset="0"/>
+                          <a:ea typeface="Yu Gothic" pitchFamily="34" charset="-122"/>
+                          <a:cs typeface="Yu Gothic" pitchFamily="34" charset="-120"/>
+                        </a:rPr>
+                        <a:t>注意</a:t>
+                      </a:r>
+                      <a:endParaRPr lang="en-US" sz="1300" dirty="0">
+                        <a:latin typeface="Yu Gothic" charset="0"/>
+                        <a:ea typeface="Yu Gothic" charset="0"/>
+                        <a:cs typeface="Yu Gothic" charset="0"/>
+                      </a:endParaRPr>
+                    </a:p>
+                  </a:txBody>
+                  <a:tcPr marL="91440" marR="91440" marT="45720" marB="45720" anchor="ctr">
+                    <a:lnL w="6350" cap="flat" cmpd="sng" algn="ctr">
+                      <a:solidFill>
+                        <a:srgbClr val="B0B0B0"/>
+                      </a:solidFill>
+                      <a:prstDash val="solid"/>
+                      <a:round/>
+                      <a:headEnd type="none" w="med" len="med"/>
+                      <a:tailEnd type="none" w="med" len="med"/>
+                    </a:lnL>
+                    <a:lnR w="6350" cap="flat" cmpd="sng" algn="ctr">
+                      <a:solidFill>
+                        <a:srgbClr val="B0B0B0"/>
+                      </a:solidFill>
+                      <a:prstDash val="solid"/>
+                      <a:round/>
+                      <a:headEnd type="none" w="med" len="med"/>
+                      <a:tailEnd type="none" w="med" len="med"/>
+                    </a:lnR>
+                    <a:lnT w="6350" cap="flat" cmpd="sng" algn="ctr">
+                      <a:solidFill>
+                        <a:srgbClr val="B0B0B0"/>
+                      </a:solidFill>
+                      <a:prstDash val="solid"/>
+                      <a:round/>
+                      <a:headEnd type="none" w="med" len="med"/>
+                      <a:tailEnd type="none" w="med" len="med"/>
+                    </a:lnT>
+                    <a:lnB w="6350" cap="flat" cmpd="sng" algn="ctr">
+                      <a:solidFill>
+                        <a:srgbClr val="B0B0B0"/>
+                      </a:solidFill>
+                      <a:prstDash val="solid"/>
+                      <a:round/>
+                      <a:headEnd type="none" w="med" len="med"/>
+                      <a:tailEnd type="none" w="med" len="med"/>
+                    </a:lnB>
+                  </a:tcPr>
+                </a:tc>
+                <a:tc>
+                  <a:txBody>
+                    <a:bodyPr/>
+                    <a:lstStyle/>
+                    <a:p>
+                      <a:pPr algn="l" indent="0" marL="0">
+                        <a:buNone/>
+                      </a:pPr>
+                      <a:r>
+                        <a:rPr lang="en-US" sz="1300" dirty="0">
+                          <a:solidFill>
+                            <a:srgbClr val="1A1A1A"/>
+                          </a:solidFill>
+                          <a:latin typeface="Yu Gothic" pitchFamily="34" charset="0"/>
+                          <a:ea typeface="Yu Gothic" pitchFamily="34" charset="-122"/>
+                          <a:cs typeface="Yu Gothic" pitchFamily="34" charset="-120"/>
                         </a:rPr>
                         <a:t>数値・固有名詞は見本</a:t>
                       </a:r>
-                      <a:endParaRPr lang="en-US" sz="1200" dirty="0">
-                        <a:latin typeface="Calibri" charset="0"/>
-                        <a:ea typeface="Calibri" charset="0"/>
-                        <a:cs typeface="Calibri" charset="0"/>
+                      <a:endParaRPr lang="en-US" sz="1300" dirty="0">
+                        <a:latin typeface="Yu Gothic" charset="0"/>
+                        <a:ea typeface="Yu Gothic" charset="0"/>
+                        <a:cs typeface="Yu Gothic" charset="0"/>
                       </a:endParaRPr>
                     </a:p>
                   </a:txBody>
@@ -2748,1757 +4369,6 @@
 </p:sld>
 </file>
 
-<file path=ppt/slides/slide11.xml><?xml version="1.0" encoding="utf-8"?>
-<p:sld xmlns:a="http://schemas.openxmlformats.org/drawingml/2006/main" xmlns:r="http://schemas.openxmlformats.org/officeDocument/2006/relationships" xmlns:p="http://schemas.openxmlformats.org/presentationml/2006/main">
-  <p:cSld name="Slide 11">
-    <p:spTree>
-      <p:nvGrpSpPr>
-        <p:cNvPr id="1" name=""/>
-        <p:cNvGrpSpPr/>
-        <p:nvPr/>
-      </p:nvGrpSpPr>
-      <p:grpSpPr>
-        <a:xfrm>
-          <a:off x="0" y="0"/>
-          <a:ext cx="0" cy="0"/>
-          <a:chOff x="0" y="0"/>
-          <a:chExt cx="0" cy="0"/>
-        </a:xfrm>
-      </p:grpSpPr>
-      <p:sp>
-        <p:nvSpPr>
-          <p:cNvPr id="2" name="Shape 0"/>
-          <p:cNvSpPr/>
-          <p:nvPr/>
-        </p:nvSpPr>
-        <p:spPr>
-          <a:xfrm>
-            <a:off x="0" y="0"/>
-            <a:ext cx="411480" cy="5143500"/>
-          </a:xfrm>
-          <a:prstGeom prst="rect">
-            <a:avLst/>
-          </a:prstGeom>
-          <a:solidFill>
-            <a:srgbClr val="0B5CAB"/>
-          </a:solidFill>
-          <a:ln/>
-        </p:spPr>
-      </p:sp>
-      <p:sp>
-        <p:nvSpPr>
-          <p:cNvPr id="3" name="Text 1"/>
-          <p:cNvSpPr/>
-          <p:nvPr/>
-        </p:nvSpPr>
-        <p:spPr>
-          <a:xfrm>
-            <a:off x="731520" y="2103120"/>
-            <a:ext cx="7680960" cy="914400"/>
-          </a:xfrm>
-          <a:prstGeom prst="rect">
-            <a:avLst/>
-          </a:prstGeom>
-          <a:noFill/>
-          <a:ln/>
-        </p:spPr>
-        <p:txBody>
-          <a:bodyPr wrap="square" rtlCol="0" anchor="ctr"/>
-          <a:lstStyle/>
-          <a:p>
-            <a:pPr algn="l" indent="0" marL="0">
-              <a:buNone/>
-            </a:pPr>
-            <a:r>
-              <a:rPr lang="en-US" sz="3200" b="1" dirty="0">
-                <a:solidFill>
-                  <a:srgbClr val="0B5CAB"/>
-                </a:solidFill>
-                <a:latin typeface="Calibri" pitchFamily="34" charset="0"/>
-                <a:ea typeface="Calibri" pitchFamily="34" charset="-122"/>
-                <a:cs typeface="Calibri" pitchFamily="34" charset="-120"/>
-              </a:rPr>
-              <a:t>次のアクション</a:t>
-            </a:r>
-            <a:endParaRPr lang="en-US" sz="3200" dirty="0"/>
-          </a:p>
-        </p:txBody>
-      </p:sp>
-    </p:spTree>
-  </p:cSld>
-  <p:clrMapOvr>
-    <a:masterClrMapping/>
-  </p:clrMapOvr>
-</p:sld>
-</file>
-
-<file path=ppt/slides/slide12.xml><?xml version="1.0" encoding="utf-8"?>
-<p:sld xmlns:a="http://schemas.openxmlformats.org/drawingml/2006/main" xmlns:r="http://schemas.openxmlformats.org/officeDocument/2006/relationships" xmlns:p="http://schemas.openxmlformats.org/presentationml/2006/main">
-  <p:cSld name="Slide 12">
-    <p:spTree>
-      <p:nvGrpSpPr>
-        <p:cNvPr id="1" name=""/>
-        <p:cNvGrpSpPr/>
-        <p:nvPr/>
-      </p:nvGrpSpPr>
-      <p:grpSpPr>
-        <a:xfrm>
-          <a:off x="0" y="0"/>
-          <a:ext cx="0" cy="0"/>
-          <a:chOff x="0" y="0"/>
-          <a:chExt cx="0" cy="0"/>
-        </a:xfrm>
-      </p:grpSpPr>
-      <p:sp>
-        <p:nvSpPr>
-          <p:cNvPr id="2" name="Shape 0"/>
-          <p:cNvSpPr/>
-          <p:nvPr/>
-        </p:nvSpPr>
-        <p:spPr>
-          <a:xfrm>
-            <a:off x="0" y="0"/>
-            <a:ext cx="201168" cy="5143500"/>
-          </a:xfrm>
-          <a:prstGeom prst="rect">
-            <a:avLst/>
-          </a:prstGeom>
-          <a:solidFill>
-            <a:srgbClr val="0B5CAB"/>
-          </a:solidFill>
-          <a:ln/>
-        </p:spPr>
-      </p:sp>
-      <p:sp>
-        <p:nvSpPr>
-          <p:cNvPr id="3" name="Text 1"/>
-          <p:cNvSpPr/>
-          <p:nvPr/>
-        </p:nvSpPr>
-        <p:spPr>
-          <a:xfrm>
-            <a:off x="502920" y="320040"/>
-            <a:ext cx="8046720" cy="640080"/>
-          </a:xfrm>
-          <a:prstGeom prst="rect">
-            <a:avLst/>
-          </a:prstGeom>
-          <a:noFill/>
-          <a:ln/>
-        </p:spPr>
-        <p:txBody>
-          <a:bodyPr wrap="square" rtlCol="0" anchor="ctr"/>
-          <a:lstStyle/>
-          <a:p>
-            <a:pPr indent="0" marL="0">
-              <a:buNone/>
-            </a:pPr>
-            <a:r>
-              <a:rPr lang="en-US" sz="2400" b="1" dirty="0">
-                <a:solidFill>
-                  <a:srgbClr val="0B5CAB"/>
-                </a:solidFill>
-                <a:latin typeface="Calibri" pitchFamily="34" charset="0"/>
-                <a:ea typeface="Calibri" pitchFamily="34" charset="-122"/>
-                <a:cs typeface="Calibri" pitchFamily="34" charset="-120"/>
-              </a:rPr>
-              <a:t>次のアクション</a:t>
-            </a:r>
-            <a:endParaRPr lang="en-US" sz="2400" dirty="0"/>
-          </a:p>
-        </p:txBody>
-      </p:sp>
-      <p:sp>
-        <p:nvSpPr>
-          <p:cNvPr id="4" name="Shape 2"/>
-          <p:cNvSpPr/>
-          <p:nvPr/>
-        </p:nvSpPr>
-        <p:spPr>
-          <a:xfrm>
-            <a:off x="502920" y="960120"/>
-            <a:ext cx="8046720" cy="0"/>
-          </a:xfrm>
-          <a:prstGeom prst="line">
-            <a:avLst/>
-          </a:prstGeom>
-          <a:noFill/>
-          <a:ln w="25400">
-            <a:solidFill>
-              <a:srgbClr val="C9DBED"/>
-            </a:solidFill>
-            <a:prstDash val="solid"/>
-          </a:ln>
-        </p:spPr>
-      </p:sp>
-      <p:sp>
-        <p:nvSpPr>
-          <p:cNvPr id="5" name="Text 3"/>
-          <p:cNvSpPr/>
-          <p:nvPr/>
-        </p:nvSpPr>
-        <p:spPr>
-          <a:xfrm>
-            <a:off x="594360" y="1280160"/>
-            <a:ext cx="7772400" cy="4114800"/>
-          </a:xfrm>
-          <a:prstGeom prst="rect">
-            <a:avLst/>
-          </a:prstGeom>
-          <a:noFill/>
-          <a:ln/>
-        </p:spPr>
-        <p:txBody>
-          <a:bodyPr wrap="square" rtlCol="0" anchor="t"/>
-          <a:lstStyle/>
-          <a:p>
-            <a:pPr algn="l" indent="0" marL="0">
-              <a:lnSpc>
-                <a:spcPts val="2400"/>
-              </a:lnSpc>
-              <a:buNone/>
-            </a:pPr>
-            <a:r>
-              <a:rPr lang="en-US" sz="1600" dirty="0">
-                <a:solidFill>
-                  <a:srgbClr val="1A1A1A"/>
-                </a:solidFill>
-                <a:latin typeface="Calibri" pitchFamily="34" charset="0"/>
-                <a:ea typeface="Calibri" pitchFamily="34" charset="-122"/>
-                <a:cs typeface="Calibri" pitchFamily="34" charset="-120"/>
-              </a:rPr>
-              <a:t>1. 見本ファイルをダウンロードして開く</a:t>
-            </a:r>
-            <a:endParaRPr lang="en-US" sz="1600" dirty="0"/>
-          </a:p>
-          <a:p>
-            <a:pPr algn="l" indent="0" marL="0">
-              <a:lnSpc>
-                <a:spcPts val="2400"/>
-              </a:lnSpc>
-              <a:buNone/>
-            </a:pPr>
-            <a:endParaRPr lang="en-US" sz="1600" dirty="0"/>
-          </a:p>
-          <a:p>
-            <a:pPr algn="l" indent="0" marL="0">
-              <a:lnSpc>
-                <a:spcPts val="2400"/>
-              </a:lnSpc>
-              <a:buNone/>
-            </a:pPr>
-            <a:r>
-              <a:rPr lang="en-US" sz="1600" dirty="0">
-                <a:solidFill>
-                  <a:srgbClr val="1A1A1A"/>
-                </a:solidFill>
-                <a:latin typeface="Calibri" pitchFamily="34" charset="0"/>
-                <a:ea typeface="Calibri" pitchFamily="34" charset="-122"/>
-                <a:cs typeface="Calibri" pitchFamily="34" charset="-120"/>
-              </a:rPr>
-              <a:t>2. 実際の依頼文で1件作ってみる</a:t>
-            </a:r>
-            <a:endParaRPr lang="en-US" sz="1600" dirty="0"/>
-          </a:p>
-          <a:p>
-            <a:pPr algn="l" indent="0" marL="0">
-              <a:lnSpc>
-                <a:spcPts val="2400"/>
-              </a:lnSpc>
-              <a:buNone/>
-            </a:pPr>
-            <a:endParaRPr lang="en-US" sz="1600" dirty="0"/>
-          </a:p>
-          <a:p>
-            <a:pPr algn="l" indent="0" marL="0">
-              <a:lnSpc>
-                <a:spcPts val="2400"/>
-              </a:lnSpc>
-              <a:buNone/>
-            </a:pPr>
-            <a:r>
-              <a:rPr lang="en-US" sz="1600" dirty="0">
-                <a:solidFill>
-                  <a:srgbClr val="1A1A1A"/>
-                </a:solidFill>
-                <a:latin typeface="Calibri" pitchFamily="34" charset="0"/>
-                <a:ea typeface="Calibri" pitchFamily="34" charset="-122"/>
-                <a:cs typeface="Calibri" pitchFamily="34" charset="-120"/>
-              </a:rPr>
-              <a:t>3. 必要ならテンプレやトーンを記憶させる</a:t>
-            </a:r>
-            <a:endParaRPr lang="en-US" sz="1600" dirty="0"/>
-          </a:p>
-        </p:txBody>
-      </p:sp>
-    </p:spTree>
-  </p:cSld>
-  <p:clrMapOvr>
-    <a:masterClrMapping/>
-  </p:clrMapOvr>
-</p:sld>
-</file>
-
-<file path=ppt/slides/slide13.xml><?xml version="1.0" encoding="utf-8"?>
-<p:sld xmlns:a="http://schemas.openxmlformats.org/drawingml/2006/main" xmlns:r="http://schemas.openxmlformats.org/officeDocument/2006/relationships" xmlns:p="http://schemas.openxmlformats.org/presentationml/2006/main">
-  <p:cSld name="Slide 13">
-    <p:spTree>
-      <p:nvGrpSpPr>
-        <p:cNvPr id="1" name=""/>
-        <p:cNvGrpSpPr/>
-        <p:nvPr/>
-      </p:nvGrpSpPr>
-      <p:grpSpPr>
-        <a:xfrm>
-          <a:off x="0" y="0"/>
-          <a:ext cx="0" cy="0"/>
-          <a:chOff x="0" y="0"/>
-          <a:chExt cx="0" cy="0"/>
-        </a:xfrm>
-      </p:grpSpPr>
-      <p:sp>
-        <p:nvSpPr>
-          <p:cNvPr id="2" name="Shape 0"/>
-          <p:cNvSpPr/>
-          <p:nvPr/>
-        </p:nvSpPr>
-        <p:spPr>
-          <a:xfrm>
-            <a:off x="0" y="0"/>
-            <a:ext cx="201168" cy="5143500"/>
-          </a:xfrm>
-          <a:prstGeom prst="rect">
-            <a:avLst/>
-          </a:prstGeom>
-          <a:solidFill>
-            <a:srgbClr val="0B5CAB"/>
-          </a:solidFill>
-          <a:ln/>
-        </p:spPr>
-      </p:sp>
-      <p:sp>
-        <p:nvSpPr>
-          <p:cNvPr id="3" name="Text 1"/>
-          <p:cNvSpPr/>
-          <p:nvPr/>
-        </p:nvSpPr>
-        <p:spPr>
-          <a:xfrm>
-            <a:off x="502920" y="320040"/>
-            <a:ext cx="8046720" cy="640080"/>
-          </a:xfrm>
-          <a:prstGeom prst="rect">
-            <a:avLst/>
-          </a:prstGeom>
-          <a:noFill/>
-          <a:ln/>
-        </p:spPr>
-        <p:txBody>
-          <a:bodyPr wrap="square" rtlCol="0" anchor="ctr"/>
-          <a:lstStyle/>
-          <a:p>
-            <a:pPr indent="0" marL="0">
-              <a:buNone/>
-            </a:pPr>
-            <a:r>
-              <a:rPr lang="en-US" sz="2400" b="1" dirty="0">
-                <a:solidFill>
-                  <a:srgbClr val="0B5CAB"/>
-                </a:solidFill>
-                <a:latin typeface="Calibri" pitchFamily="34" charset="0"/>
-                <a:ea typeface="Calibri" pitchFamily="34" charset="-122"/>
-                <a:cs typeface="Calibri" pitchFamily="34" charset="-120"/>
-              </a:rPr>
-              <a:t>サマリー</a:t>
-            </a:r>
-            <a:endParaRPr lang="en-US" sz="2400" dirty="0"/>
-          </a:p>
-        </p:txBody>
-      </p:sp>
-      <p:sp>
-        <p:nvSpPr>
-          <p:cNvPr id="4" name="Shape 2"/>
-          <p:cNvSpPr/>
-          <p:nvPr/>
-        </p:nvSpPr>
-        <p:spPr>
-          <a:xfrm>
-            <a:off x="502920" y="960120"/>
-            <a:ext cx="8046720" cy="0"/>
-          </a:xfrm>
-          <a:prstGeom prst="line">
-            <a:avLst/>
-          </a:prstGeom>
-          <a:noFill/>
-          <a:ln w="25400">
-            <a:solidFill>
-              <a:srgbClr val="C9DBED"/>
-            </a:solidFill>
-            <a:prstDash val="solid"/>
-          </a:ln>
-        </p:spPr>
-      </p:sp>
-      <p:sp>
-        <p:nvSpPr>
-          <p:cNvPr id="5" name="Text 3"/>
-          <p:cNvSpPr/>
-          <p:nvPr/>
-        </p:nvSpPr>
-        <p:spPr>
-          <a:xfrm>
-            <a:off x="594360" y="1325880"/>
-            <a:ext cx="7772400" cy="4114800"/>
-          </a:xfrm>
-          <a:prstGeom prst="rect">
-            <a:avLst/>
-          </a:prstGeom>
-          <a:noFill/>
-          <a:ln/>
-        </p:spPr>
-        <p:txBody>
-          <a:bodyPr wrap="square" rtlCol="0" anchor="t"/>
-          <a:lstStyle/>
-          <a:p>
-            <a:pPr algn="l" marL="342900" indent="-342900">
-              <a:lnSpc>
-                <a:spcPts val="2600"/>
-              </a:lnSpc>
-              <a:buSzPct val="100000"/>
-              <a:buChar char="•"/>
-            </a:pPr>
-            <a:r>
-              <a:rPr lang="en-US" sz="1800" dirty="0">
-                <a:solidFill>
-                  <a:srgbClr val="1A1A1A"/>
-                </a:solidFill>
-                <a:latin typeface="Calibri" pitchFamily="34" charset="0"/>
-                <a:ea typeface="Calibri" pitchFamily="34" charset="-122"/>
-                <a:cs typeface="Calibri" pitchFamily="34" charset="-120"/>
-              </a:rPr>
-              <a:t>課題</a:t>
-            </a:r>
-            <a:endParaRPr lang="en-US" sz="1800" dirty="0"/>
-          </a:p>
-          <a:p>
-            <a:pPr algn="l" marL="342900" indent="-342900">
-              <a:lnSpc>
-                <a:spcPts val="2600"/>
-              </a:lnSpc>
-              <a:buSzPct val="100000"/>
-              <a:buChar char="•"/>
-            </a:pPr>
-            <a:r>
-              <a:rPr lang="en-US" sz="1800" dirty="0">
-                <a:solidFill>
-                  <a:srgbClr val="1A1A1A"/>
-                </a:solidFill>
-                <a:latin typeface="Calibri" pitchFamily="34" charset="0"/>
-                <a:ea typeface="Calibri" pitchFamily="34" charset="-122"/>
-                <a:cs typeface="Calibri" pitchFamily="34" charset="-120"/>
-              </a:rPr>
-              <a:t>提案</a:t>
-            </a:r>
-            <a:endParaRPr lang="en-US" sz="1800" dirty="0"/>
-          </a:p>
-          <a:p>
-            <a:pPr algn="l" marL="342900" indent="-342900">
-              <a:lnSpc>
-                <a:spcPts val="2600"/>
-              </a:lnSpc>
-              <a:buSzPct val="100000"/>
-              <a:buChar char="•"/>
-            </a:pPr>
-            <a:r>
-              <a:rPr lang="en-US" sz="1800" dirty="0">
-                <a:solidFill>
-                  <a:srgbClr val="1A1A1A"/>
-                </a:solidFill>
-                <a:latin typeface="Calibri" pitchFamily="34" charset="0"/>
-                <a:ea typeface="Calibri" pitchFamily="34" charset="-122"/>
-                <a:cs typeface="Calibri" pitchFamily="34" charset="-120"/>
-              </a:rPr>
-              <a:t>効果</a:t>
-            </a:r>
-            <a:endParaRPr lang="en-US" sz="1800" dirty="0"/>
-          </a:p>
-          <a:p>
-            <a:pPr algn="l" marL="342900" indent="-342900">
-              <a:lnSpc>
-                <a:spcPts val="2600"/>
-              </a:lnSpc>
-              <a:buSzPct val="100000"/>
-              <a:buChar char="•"/>
-            </a:pPr>
-            <a:r>
-              <a:rPr lang="en-US" sz="1800" dirty="0">
-                <a:solidFill>
-                  <a:srgbClr val="1A1A1A"/>
-                </a:solidFill>
-                <a:latin typeface="Calibri" pitchFamily="34" charset="0"/>
-                <a:ea typeface="Calibri" pitchFamily="34" charset="-122"/>
-                <a:cs typeface="Calibri" pitchFamily="34" charset="-120"/>
-              </a:rPr>
-              <a:t>次のアクション</a:t>
-            </a:r>
-            <a:endParaRPr lang="en-US" sz="1800" dirty="0"/>
-          </a:p>
-        </p:txBody>
-      </p:sp>
-    </p:spTree>
-  </p:cSld>
-  <p:clrMapOvr>
-    <a:masterClrMapping/>
-  </p:clrMapOvr>
-</p:sld>
-</file>
-
-<file path=ppt/slides/slide14.xml><?xml version="1.0" encoding="utf-8"?>
-<p:sld xmlns:a="http://schemas.openxmlformats.org/drawingml/2006/main" xmlns:r="http://schemas.openxmlformats.org/officeDocument/2006/relationships" xmlns:p="http://schemas.openxmlformats.org/presentationml/2006/main">
-  <p:cSld name="Slide 14">
-    <p:spTree>
-      <p:nvGrpSpPr>
-        <p:cNvPr id="1" name=""/>
-        <p:cNvGrpSpPr/>
-        <p:nvPr/>
-      </p:nvGrpSpPr>
-      <p:grpSpPr>
-        <a:xfrm>
-          <a:off x="0" y="0"/>
-          <a:ext cx="0" cy="0"/>
-          <a:chOff x="0" y="0"/>
-          <a:chExt cx="0" cy="0"/>
-        </a:xfrm>
-      </p:grpSpPr>
-      <p:sp>
-        <p:nvSpPr>
-          <p:cNvPr id="2" name="Shape 0"/>
-          <p:cNvSpPr/>
-          <p:nvPr/>
-        </p:nvSpPr>
-        <p:spPr>
-          <a:xfrm>
-            <a:off x="0" y="0"/>
-            <a:ext cx="411480" cy="5143500"/>
-          </a:xfrm>
-          <a:prstGeom prst="rect">
-            <a:avLst/>
-          </a:prstGeom>
-          <a:solidFill>
-            <a:srgbClr val="0B5CAB"/>
-          </a:solidFill>
-          <a:ln/>
-        </p:spPr>
-      </p:sp>
-      <p:sp>
-        <p:nvSpPr>
-          <p:cNvPr id="3" name="Text 1"/>
-          <p:cNvSpPr/>
-          <p:nvPr/>
-        </p:nvSpPr>
-        <p:spPr>
-          <a:xfrm>
-            <a:off x="731520" y="2103120"/>
-            <a:ext cx="7680960" cy="914400"/>
-          </a:xfrm>
-          <a:prstGeom prst="rect">
-            <a:avLst/>
-          </a:prstGeom>
-          <a:noFill/>
-          <a:ln/>
-        </p:spPr>
-        <p:txBody>
-          <a:bodyPr wrap="square" rtlCol="0" anchor="ctr"/>
-          <a:lstStyle/>
-          <a:p>
-            <a:pPr algn="l" indent="0" marL="0">
-              <a:buNone/>
-            </a:pPr>
-            <a:r>
-              <a:rPr lang="en-US" sz="3200" b="1" dirty="0">
-                <a:solidFill>
-                  <a:srgbClr val="0B5CAB"/>
-                </a:solidFill>
-                <a:latin typeface="Calibri" pitchFamily="34" charset="0"/>
-                <a:ea typeface="Calibri" pitchFamily="34" charset="-122"/>
-                <a:cs typeface="Calibri" pitchFamily="34" charset="-120"/>
-              </a:rPr>
-              <a:t>ありがとうございました</a:t>
-            </a:r>
-            <a:endParaRPr lang="en-US" sz="3200" dirty="0"/>
-          </a:p>
-        </p:txBody>
-      </p:sp>
-      <p:sp>
-        <p:nvSpPr>
-          <p:cNvPr id="4" name="Text 2"/>
-          <p:cNvSpPr/>
-          <p:nvPr/>
-        </p:nvSpPr>
-        <p:spPr>
-          <a:xfrm>
-            <a:off x="548640" y="3200400"/>
-            <a:ext cx="8046720" cy="457200"/>
-          </a:xfrm>
-          <a:prstGeom prst="rect">
-            <a:avLst/>
-          </a:prstGeom>
-          <a:noFill/>
-          <a:ln/>
-        </p:spPr>
-        <p:txBody>
-          <a:bodyPr wrap="square" rtlCol="0" anchor="ctr"/>
-          <a:lstStyle/>
-          <a:p>
-            <a:pPr algn="ctr" indent="0" marL="0">
-              <a:buNone/>
-            </a:pPr>
-            <a:r>
-              <a:rPr lang="en-US" sz="1400" dirty="0">
-                <a:solidFill>
-                  <a:srgbClr val="5A5A5A"/>
-                </a:solidFill>
-                <a:latin typeface="Calibri" pitchFamily="34" charset="0"/>
-                <a:ea typeface="Calibri" pitchFamily="34" charset="-122"/>
-                <a:cs typeface="Calibri" pitchFamily="34" charset="-120"/>
-              </a:rPr>
-              <a:t>営業提案スライド（見本）</a:t>
-            </a:r>
-            <a:endParaRPr lang="en-US" sz="1400" dirty="0"/>
-          </a:p>
-        </p:txBody>
-      </p:sp>
-    </p:spTree>
-  </p:cSld>
-  <p:clrMapOvr>
-    <a:masterClrMapping/>
-  </p:clrMapOvr>
-</p:sld>
-</file>
-
-<file path=ppt/slides/slide2.xml><?xml version="1.0" encoding="utf-8"?>
-<p:sld xmlns:a="http://schemas.openxmlformats.org/drawingml/2006/main" xmlns:r="http://schemas.openxmlformats.org/officeDocument/2006/relationships" xmlns:p="http://schemas.openxmlformats.org/presentationml/2006/main">
-  <p:cSld name="Slide 2">
-    <p:spTree>
-      <p:nvGrpSpPr>
-        <p:cNvPr id="1" name=""/>
-        <p:cNvGrpSpPr/>
-        <p:nvPr/>
-      </p:nvGrpSpPr>
-      <p:grpSpPr>
-        <a:xfrm>
-          <a:off x="0" y="0"/>
-          <a:ext cx="0" cy="0"/>
-          <a:chOff x="0" y="0"/>
-          <a:chExt cx="0" cy="0"/>
-        </a:xfrm>
-      </p:grpSpPr>
-      <p:sp>
-        <p:nvSpPr>
-          <p:cNvPr id="2" name="Shape 0"/>
-          <p:cNvSpPr/>
-          <p:nvPr/>
-        </p:nvSpPr>
-        <p:spPr>
-          <a:xfrm>
-            <a:off x="0" y="0"/>
-            <a:ext cx="201168" cy="5143500"/>
-          </a:xfrm>
-          <a:prstGeom prst="rect">
-            <a:avLst/>
-          </a:prstGeom>
-          <a:solidFill>
-            <a:srgbClr val="0B5CAB"/>
-          </a:solidFill>
-          <a:ln/>
-        </p:spPr>
-      </p:sp>
-      <p:sp>
-        <p:nvSpPr>
-          <p:cNvPr id="3" name="Text 1"/>
-          <p:cNvSpPr/>
-          <p:nvPr/>
-        </p:nvSpPr>
-        <p:spPr>
-          <a:xfrm>
-            <a:off x="502920" y="320040"/>
-            <a:ext cx="8046720" cy="640080"/>
-          </a:xfrm>
-          <a:prstGeom prst="rect">
-            <a:avLst/>
-          </a:prstGeom>
-          <a:noFill/>
-          <a:ln/>
-        </p:spPr>
-        <p:txBody>
-          <a:bodyPr wrap="square" rtlCol="0" anchor="ctr"/>
-          <a:lstStyle/>
-          <a:p>
-            <a:pPr indent="0" marL="0">
-              <a:buNone/>
-            </a:pPr>
-            <a:r>
-              <a:rPr lang="en-US" sz="2400" b="1" dirty="0">
-                <a:solidFill>
-                  <a:srgbClr val="0B5CAB"/>
-                </a:solidFill>
-                <a:latin typeface="Calibri" pitchFamily="34" charset="0"/>
-                <a:ea typeface="Calibri" pitchFamily="34" charset="-122"/>
-                <a:cs typeface="Calibri" pitchFamily="34" charset="-120"/>
-              </a:rPr>
-              <a:t>アジェンダ</a:t>
-            </a:r>
-            <a:endParaRPr lang="en-US" sz="2400" dirty="0"/>
-          </a:p>
-        </p:txBody>
-      </p:sp>
-      <p:sp>
-        <p:nvSpPr>
-          <p:cNvPr id="4" name="Shape 2"/>
-          <p:cNvSpPr/>
-          <p:nvPr/>
-        </p:nvSpPr>
-        <p:spPr>
-          <a:xfrm>
-            <a:off x="502920" y="960120"/>
-            <a:ext cx="8046720" cy="0"/>
-          </a:xfrm>
-          <a:prstGeom prst="line">
-            <a:avLst/>
-          </a:prstGeom>
-          <a:noFill/>
-          <a:ln w="25400">
-            <a:solidFill>
-              <a:srgbClr val="C9DBED"/>
-            </a:solidFill>
-            <a:prstDash val="solid"/>
-          </a:ln>
-        </p:spPr>
-      </p:sp>
-      <p:sp>
-        <p:nvSpPr>
-          <p:cNvPr id="5" name="Text 3"/>
-          <p:cNvSpPr/>
-          <p:nvPr/>
-        </p:nvSpPr>
-        <p:spPr>
-          <a:xfrm>
-            <a:off x="594360" y="1325880"/>
-            <a:ext cx="7772400" cy="4114800"/>
-          </a:xfrm>
-          <a:prstGeom prst="rect">
-            <a:avLst/>
-          </a:prstGeom>
-          <a:noFill/>
-          <a:ln/>
-        </p:spPr>
-        <p:txBody>
-          <a:bodyPr wrap="square" rtlCol="0" anchor="t"/>
-          <a:lstStyle/>
-          <a:p>
-            <a:pPr algn="l" marL="342900" indent="-342900">
-              <a:lnSpc>
-                <a:spcPts val="2200"/>
-              </a:lnSpc>
-              <a:buSzPct val="100000"/>
-              <a:buChar char="•"/>
-            </a:pPr>
-            <a:r>
-              <a:rPr lang="en-US" sz="1800" dirty="0">
-                <a:solidFill>
-                  <a:srgbClr val="1A1A1A"/>
-                </a:solidFill>
-                <a:latin typeface="Calibri" pitchFamily="34" charset="0"/>
-                <a:ea typeface="Calibri" pitchFamily="34" charset="-122"/>
-                <a:cs typeface="Calibri" pitchFamily="34" charset="-120"/>
-              </a:rPr>
-              <a:t>課題</a:t>
-            </a:r>
-            <a:endParaRPr lang="en-US" sz="1800" dirty="0"/>
-          </a:p>
-          <a:p>
-            <a:pPr algn="l" marL="342900" indent="-342900">
-              <a:lnSpc>
-                <a:spcPts val="2200"/>
-              </a:lnSpc>
-              <a:buSzPct val="100000"/>
-              <a:buChar char="•"/>
-            </a:pPr>
-            <a:r>
-              <a:rPr lang="en-US" sz="1800" dirty="0">
-                <a:solidFill>
-                  <a:srgbClr val="1A1A1A"/>
-                </a:solidFill>
-                <a:latin typeface="Calibri" pitchFamily="34" charset="0"/>
-                <a:ea typeface="Calibri" pitchFamily="34" charset="-122"/>
-                <a:cs typeface="Calibri" pitchFamily="34" charset="-120"/>
-              </a:rPr>
-              <a:t>提案</a:t>
-            </a:r>
-            <a:endParaRPr lang="en-US" sz="1800" dirty="0"/>
-          </a:p>
-          <a:p>
-            <a:pPr algn="l" marL="342900" indent="-342900">
-              <a:lnSpc>
-                <a:spcPts val="2200"/>
-              </a:lnSpc>
-              <a:buSzPct val="100000"/>
-              <a:buChar char="•"/>
-            </a:pPr>
-            <a:r>
-              <a:rPr lang="en-US" sz="1800" dirty="0">
-                <a:solidFill>
-                  <a:srgbClr val="1A1A1A"/>
-                </a:solidFill>
-                <a:latin typeface="Calibri" pitchFamily="34" charset="0"/>
-                <a:ea typeface="Calibri" pitchFamily="34" charset="-122"/>
-                <a:cs typeface="Calibri" pitchFamily="34" charset="-120"/>
-              </a:rPr>
-              <a:t>効果</a:t>
-            </a:r>
-            <a:endParaRPr lang="en-US" sz="1800" dirty="0"/>
-          </a:p>
-          <a:p>
-            <a:pPr algn="l" marL="342900" indent="-342900">
-              <a:lnSpc>
-                <a:spcPts val="2200"/>
-              </a:lnSpc>
-              <a:buSzPct val="100000"/>
-              <a:buChar char="•"/>
-            </a:pPr>
-            <a:r>
-              <a:rPr lang="en-US" sz="1800" dirty="0">
-                <a:solidFill>
-                  <a:srgbClr val="1A1A1A"/>
-                </a:solidFill>
-                <a:latin typeface="Calibri" pitchFamily="34" charset="0"/>
-                <a:ea typeface="Calibri" pitchFamily="34" charset="-122"/>
-                <a:cs typeface="Calibri" pitchFamily="34" charset="-120"/>
-              </a:rPr>
-              <a:t>次のアクション</a:t>
-            </a:r>
-            <a:endParaRPr lang="en-US" sz="1800" dirty="0"/>
-          </a:p>
-        </p:txBody>
-      </p:sp>
-    </p:spTree>
-  </p:cSld>
-  <p:clrMapOvr>
-    <a:masterClrMapping/>
-  </p:clrMapOvr>
-</p:sld>
-</file>
-
-<file path=ppt/slides/slide3.xml><?xml version="1.0" encoding="utf-8"?>
-<p:sld xmlns:a="http://schemas.openxmlformats.org/drawingml/2006/main" xmlns:r="http://schemas.openxmlformats.org/officeDocument/2006/relationships" xmlns:p="http://schemas.openxmlformats.org/presentationml/2006/main">
-  <p:cSld name="Slide 3">
-    <p:spTree>
-      <p:nvGrpSpPr>
-        <p:cNvPr id="1" name=""/>
-        <p:cNvGrpSpPr/>
-        <p:nvPr/>
-      </p:nvGrpSpPr>
-      <p:grpSpPr>
-        <a:xfrm>
-          <a:off x="0" y="0"/>
-          <a:ext cx="0" cy="0"/>
-          <a:chOff x="0" y="0"/>
-          <a:chExt cx="0" cy="0"/>
-        </a:xfrm>
-      </p:grpSpPr>
-      <p:sp>
-        <p:nvSpPr>
-          <p:cNvPr id="2" name="Shape 0"/>
-          <p:cNvSpPr/>
-          <p:nvPr/>
-        </p:nvSpPr>
-        <p:spPr>
-          <a:xfrm>
-            <a:off x="0" y="0"/>
-            <a:ext cx="411480" cy="5143500"/>
-          </a:xfrm>
-          <a:prstGeom prst="rect">
-            <a:avLst/>
-          </a:prstGeom>
-          <a:solidFill>
-            <a:srgbClr val="0B5CAB"/>
-          </a:solidFill>
-          <a:ln/>
-        </p:spPr>
-      </p:sp>
-      <p:sp>
-        <p:nvSpPr>
-          <p:cNvPr id="3" name="Text 1"/>
-          <p:cNvSpPr/>
-          <p:nvPr/>
-        </p:nvSpPr>
-        <p:spPr>
-          <a:xfrm>
-            <a:off x="731520" y="2103120"/>
-            <a:ext cx="7680960" cy="914400"/>
-          </a:xfrm>
-          <a:prstGeom prst="rect">
-            <a:avLst/>
-          </a:prstGeom>
-          <a:noFill/>
-          <a:ln/>
-        </p:spPr>
-        <p:txBody>
-          <a:bodyPr wrap="square" rtlCol="0" anchor="ctr"/>
-          <a:lstStyle/>
-          <a:p>
-            <a:pPr algn="l" indent="0" marL="0">
-              <a:buNone/>
-            </a:pPr>
-            <a:r>
-              <a:rPr lang="en-US" sz="3200" b="1" dirty="0">
-                <a:solidFill>
-                  <a:srgbClr val="0B5CAB"/>
-                </a:solidFill>
-                <a:latin typeface="Calibri" pitchFamily="34" charset="0"/>
-                <a:ea typeface="Calibri" pitchFamily="34" charset="-122"/>
-                <a:cs typeface="Calibri" pitchFamily="34" charset="-120"/>
-              </a:rPr>
-              <a:t>課題</a:t>
-            </a:r>
-            <a:endParaRPr lang="en-US" sz="3200" dirty="0"/>
-          </a:p>
-        </p:txBody>
-      </p:sp>
-    </p:spTree>
-  </p:cSld>
-  <p:clrMapOvr>
-    <a:masterClrMapping/>
-  </p:clrMapOvr>
-</p:sld>
-</file>
-
-<file path=ppt/slides/slide4.xml><?xml version="1.0" encoding="utf-8"?>
-<p:sld xmlns:a="http://schemas.openxmlformats.org/drawingml/2006/main" xmlns:r="http://schemas.openxmlformats.org/officeDocument/2006/relationships" xmlns:p="http://schemas.openxmlformats.org/presentationml/2006/main">
-  <p:cSld name="Slide 4">
-    <p:spTree>
-      <p:nvGrpSpPr>
-        <p:cNvPr id="1" name=""/>
-        <p:cNvGrpSpPr/>
-        <p:nvPr/>
-      </p:nvGrpSpPr>
-      <p:grpSpPr>
-        <a:xfrm>
-          <a:off x="0" y="0"/>
-          <a:ext cx="0" cy="0"/>
-          <a:chOff x="0" y="0"/>
-          <a:chExt cx="0" cy="0"/>
-        </a:xfrm>
-      </p:grpSpPr>
-      <p:sp>
-        <p:nvSpPr>
-          <p:cNvPr id="2" name="Shape 0"/>
-          <p:cNvSpPr/>
-          <p:nvPr/>
-        </p:nvSpPr>
-        <p:spPr>
-          <a:xfrm>
-            <a:off x="0" y="0"/>
-            <a:ext cx="201168" cy="5143500"/>
-          </a:xfrm>
-          <a:prstGeom prst="rect">
-            <a:avLst/>
-          </a:prstGeom>
-          <a:solidFill>
-            <a:srgbClr val="0B5CAB"/>
-          </a:solidFill>
-          <a:ln/>
-        </p:spPr>
-      </p:sp>
-      <p:sp>
-        <p:nvSpPr>
-          <p:cNvPr id="3" name="Text 1"/>
-          <p:cNvSpPr/>
-          <p:nvPr/>
-        </p:nvSpPr>
-        <p:spPr>
-          <a:xfrm>
-            <a:off x="502920" y="320040"/>
-            <a:ext cx="8046720" cy="640080"/>
-          </a:xfrm>
-          <a:prstGeom prst="rect">
-            <a:avLst/>
-          </a:prstGeom>
-          <a:noFill/>
-          <a:ln/>
-        </p:spPr>
-        <p:txBody>
-          <a:bodyPr wrap="square" rtlCol="0" anchor="ctr"/>
-          <a:lstStyle/>
-          <a:p>
-            <a:pPr indent="0" marL="0">
-              <a:buNone/>
-            </a:pPr>
-            <a:r>
-              <a:rPr lang="en-US" sz="2400" b="1" dirty="0">
-                <a:solidFill>
-                  <a:srgbClr val="0B5CAB"/>
-                </a:solidFill>
-                <a:latin typeface="Calibri" pitchFamily="34" charset="0"/>
-                <a:ea typeface="Calibri" pitchFamily="34" charset="-122"/>
-                <a:cs typeface="Calibri" pitchFamily="34" charset="-120"/>
-              </a:rPr>
-              <a:t>課題 — Key points</a:t>
-            </a:r>
-            <a:endParaRPr lang="en-US" sz="2400" dirty="0"/>
-          </a:p>
-        </p:txBody>
-      </p:sp>
-      <p:sp>
-        <p:nvSpPr>
-          <p:cNvPr id="4" name="Shape 2"/>
-          <p:cNvSpPr/>
-          <p:nvPr/>
-        </p:nvSpPr>
-        <p:spPr>
-          <a:xfrm>
-            <a:off x="502920" y="960120"/>
-            <a:ext cx="8046720" cy="0"/>
-          </a:xfrm>
-          <a:prstGeom prst="line">
-            <a:avLst/>
-          </a:prstGeom>
-          <a:noFill/>
-          <a:ln w="25400">
-            <a:solidFill>
-              <a:srgbClr val="C9DBED"/>
-            </a:solidFill>
-            <a:prstDash val="solid"/>
-          </a:ln>
-        </p:spPr>
-      </p:sp>
-      <p:sp>
-        <p:nvSpPr>
-          <p:cNvPr id="5" name="Text 3"/>
-          <p:cNvSpPr/>
-          <p:nvPr/>
-        </p:nvSpPr>
-        <p:spPr>
-          <a:xfrm>
-            <a:off x="594360" y="1325880"/>
-            <a:ext cx="7772400" cy="4114800"/>
-          </a:xfrm>
-          <a:prstGeom prst="rect">
-            <a:avLst/>
-          </a:prstGeom>
-          <a:noFill/>
-          <a:ln/>
-        </p:spPr>
-        <p:txBody>
-          <a:bodyPr wrap="square" rtlCol="0" anchor="t"/>
-          <a:lstStyle/>
-          <a:p>
-            <a:pPr algn="l" marL="342900" indent="-342900">
-              <a:lnSpc>
-                <a:spcPts val="2600"/>
-              </a:lnSpc>
-              <a:buSzPct val="100000"/>
-              <a:buChar char="•"/>
-            </a:pPr>
-            <a:r>
-              <a:rPr lang="en-US" sz="1700" dirty="0">
-                <a:solidFill>
-                  <a:srgbClr val="1A1A1A"/>
-                </a:solidFill>
-                <a:latin typeface="Calibri" pitchFamily="34" charset="0"/>
-                <a:ea typeface="Calibri" pitchFamily="34" charset="-122"/>
-                <a:cs typeface="Calibri" pitchFamily="34" charset="-120"/>
-              </a:rPr>
-              <a:t>資料作成に毎回時間がかかる</a:t>
-            </a:r>
-            <a:endParaRPr lang="en-US" sz="1700" dirty="0"/>
-          </a:p>
-          <a:p>
-            <a:pPr algn="l" marL="342900" indent="-342900">
-              <a:lnSpc>
-                <a:spcPts val="2600"/>
-              </a:lnSpc>
-              <a:buSzPct val="100000"/>
-              <a:buChar char="•"/>
-            </a:pPr>
-            <a:r>
-              <a:rPr lang="en-US" sz="1700" dirty="0">
-                <a:solidFill>
-                  <a:srgbClr val="1A1A1A"/>
-                </a:solidFill>
-                <a:latin typeface="Calibri" pitchFamily="34" charset="0"/>
-                <a:ea typeface="Calibri" pitchFamily="34" charset="-122"/>
-                <a:cs typeface="Calibri" pitchFamily="34" charset="-120"/>
-              </a:rPr>
-              <a:t>構成が担当者ごとにばらつく</a:t>
-            </a:r>
-            <a:endParaRPr lang="en-US" sz="1700" dirty="0"/>
-          </a:p>
-          <a:p>
-            <a:pPr algn="l" marL="342900" indent="-342900">
-              <a:lnSpc>
-                <a:spcPts val="2600"/>
-              </a:lnSpc>
-              <a:buSzPct val="100000"/>
-              <a:buChar char="•"/>
-            </a:pPr>
-            <a:r>
-              <a:rPr lang="en-US" sz="1700" dirty="0">
-                <a:solidFill>
-                  <a:srgbClr val="1A1A1A"/>
-                </a:solidFill>
-                <a:latin typeface="Calibri" pitchFamily="34" charset="0"/>
-                <a:ea typeface="Calibri" pitchFamily="34" charset="-122"/>
-                <a:cs typeface="Calibri" pitchFamily="34" charset="-120"/>
-              </a:rPr>
-              <a:t>確認前に形が揃わない</a:t>
-            </a:r>
-            <a:endParaRPr lang="en-US" sz="1700" dirty="0"/>
-          </a:p>
-        </p:txBody>
-      </p:sp>
-    </p:spTree>
-  </p:cSld>
-  <p:clrMapOvr>
-    <a:masterClrMapping/>
-  </p:clrMapOvr>
-</p:sld>
-</file>
-
-<file path=ppt/slides/slide5.xml><?xml version="1.0" encoding="utf-8"?>
-<p:sld xmlns:a="http://schemas.openxmlformats.org/drawingml/2006/main" xmlns:r="http://schemas.openxmlformats.org/officeDocument/2006/relationships" xmlns:p="http://schemas.openxmlformats.org/presentationml/2006/main">
-  <p:cSld name="Slide 5">
-    <p:spTree>
-      <p:nvGrpSpPr>
-        <p:cNvPr id="1" name=""/>
-        <p:cNvGrpSpPr/>
-        <p:nvPr/>
-      </p:nvGrpSpPr>
-      <p:grpSpPr>
-        <a:xfrm>
-          <a:off x="0" y="0"/>
-          <a:ext cx="0" cy="0"/>
-          <a:chOff x="0" y="0"/>
-          <a:chExt cx="0" cy="0"/>
-        </a:xfrm>
-      </p:grpSpPr>
-      <p:sp>
-        <p:nvSpPr>
-          <p:cNvPr id="2" name="Shape 0"/>
-          <p:cNvSpPr/>
-          <p:nvPr/>
-        </p:nvSpPr>
-        <p:spPr>
-          <a:xfrm>
-            <a:off x="0" y="0"/>
-            <a:ext cx="411480" cy="5143500"/>
-          </a:xfrm>
-          <a:prstGeom prst="rect">
-            <a:avLst/>
-          </a:prstGeom>
-          <a:solidFill>
-            <a:srgbClr val="0B5CAB"/>
-          </a:solidFill>
-          <a:ln/>
-        </p:spPr>
-      </p:sp>
-      <p:sp>
-        <p:nvSpPr>
-          <p:cNvPr id="3" name="Text 1"/>
-          <p:cNvSpPr/>
-          <p:nvPr/>
-        </p:nvSpPr>
-        <p:spPr>
-          <a:xfrm>
-            <a:off x="731520" y="2103120"/>
-            <a:ext cx="7680960" cy="914400"/>
-          </a:xfrm>
-          <a:prstGeom prst="rect">
-            <a:avLst/>
-          </a:prstGeom>
-          <a:noFill/>
-          <a:ln/>
-        </p:spPr>
-        <p:txBody>
-          <a:bodyPr wrap="square" rtlCol="0" anchor="ctr"/>
-          <a:lstStyle/>
-          <a:p>
-            <a:pPr algn="l" indent="0" marL="0">
-              <a:buNone/>
-            </a:pPr>
-            <a:r>
-              <a:rPr lang="en-US" sz="3200" b="1" dirty="0">
-                <a:solidFill>
-                  <a:srgbClr val="0B5CAB"/>
-                </a:solidFill>
-                <a:latin typeface="Calibri" pitchFamily="34" charset="0"/>
-                <a:ea typeface="Calibri" pitchFamily="34" charset="-122"/>
-                <a:cs typeface="Calibri" pitchFamily="34" charset="-120"/>
-              </a:rPr>
-              <a:t>提案</a:t>
-            </a:r>
-            <a:endParaRPr lang="en-US" sz="3200" dirty="0"/>
-          </a:p>
-        </p:txBody>
-      </p:sp>
-    </p:spTree>
-  </p:cSld>
-  <p:clrMapOvr>
-    <a:masterClrMapping/>
-  </p:clrMapOvr>
-</p:sld>
-</file>
-
-<file path=ppt/slides/slide6.xml><?xml version="1.0" encoding="utf-8"?>
-<p:sld xmlns:a="http://schemas.openxmlformats.org/drawingml/2006/main" xmlns:r="http://schemas.openxmlformats.org/officeDocument/2006/relationships" xmlns:p="http://schemas.openxmlformats.org/presentationml/2006/main">
-  <p:cSld name="Slide 6">
-    <p:spTree>
-      <p:nvGrpSpPr>
-        <p:cNvPr id="1" name=""/>
-        <p:cNvGrpSpPr/>
-        <p:nvPr/>
-      </p:nvGrpSpPr>
-      <p:grpSpPr>
-        <a:xfrm>
-          <a:off x="0" y="0"/>
-          <a:ext cx="0" cy="0"/>
-          <a:chOff x="0" y="0"/>
-          <a:chExt cx="0" cy="0"/>
-        </a:xfrm>
-      </p:grpSpPr>
-      <p:sp>
-        <p:nvSpPr>
-          <p:cNvPr id="2" name="Shape 0"/>
-          <p:cNvSpPr/>
-          <p:nvPr/>
-        </p:nvSpPr>
-        <p:spPr>
-          <a:xfrm>
-            <a:off x="0" y="0"/>
-            <a:ext cx="201168" cy="5143500"/>
-          </a:xfrm>
-          <a:prstGeom prst="rect">
-            <a:avLst/>
-          </a:prstGeom>
-          <a:solidFill>
-            <a:srgbClr val="0B5CAB"/>
-          </a:solidFill>
-          <a:ln/>
-        </p:spPr>
-      </p:sp>
-      <p:sp>
-        <p:nvSpPr>
-          <p:cNvPr id="3" name="Text 1"/>
-          <p:cNvSpPr/>
-          <p:nvPr/>
-        </p:nvSpPr>
-        <p:spPr>
-          <a:xfrm>
-            <a:off x="502920" y="320040"/>
-            <a:ext cx="8046720" cy="640080"/>
-          </a:xfrm>
-          <a:prstGeom prst="rect">
-            <a:avLst/>
-          </a:prstGeom>
-          <a:noFill/>
-          <a:ln/>
-        </p:spPr>
-        <p:txBody>
-          <a:bodyPr wrap="square" rtlCol="0" anchor="ctr"/>
-          <a:lstStyle/>
-          <a:p>
-            <a:pPr indent="0" marL="0">
-              <a:buNone/>
-            </a:pPr>
-            <a:r>
-              <a:rPr lang="en-US" sz="2400" b="1" dirty="0">
-                <a:solidFill>
-                  <a:srgbClr val="0B5CAB"/>
-                </a:solidFill>
-                <a:latin typeface="Calibri" pitchFamily="34" charset="0"/>
-                <a:ea typeface="Calibri" pitchFamily="34" charset="-122"/>
-                <a:cs typeface="Calibri" pitchFamily="34" charset="-120"/>
-              </a:rPr>
-              <a:t>提案 — Key points</a:t>
-            </a:r>
-            <a:endParaRPr lang="en-US" sz="2400" dirty="0"/>
-          </a:p>
-        </p:txBody>
-      </p:sp>
-      <p:sp>
-        <p:nvSpPr>
-          <p:cNvPr id="4" name="Shape 2"/>
-          <p:cNvSpPr/>
-          <p:nvPr/>
-        </p:nvSpPr>
-        <p:spPr>
-          <a:xfrm>
-            <a:off x="502920" y="960120"/>
-            <a:ext cx="8046720" cy="0"/>
-          </a:xfrm>
-          <a:prstGeom prst="line">
-            <a:avLst/>
-          </a:prstGeom>
-          <a:noFill/>
-          <a:ln w="25400">
-            <a:solidFill>
-              <a:srgbClr val="C9DBED"/>
-            </a:solidFill>
-            <a:prstDash val="solid"/>
-          </a:ln>
-        </p:spPr>
-      </p:sp>
-      <p:sp>
-        <p:nvSpPr>
-          <p:cNvPr id="5" name="Text 3"/>
-          <p:cNvSpPr/>
-          <p:nvPr/>
-        </p:nvSpPr>
-        <p:spPr>
-          <a:xfrm>
-            <a:off x="594360" y="1325880"/>
-            <a:ext cx="7772400" cy="4114800"/>
-          </a:xfrm>
-          <a:prstGeom prst="rect">
-            <a:avLst/>
-          </a:prstGeom>
-          <a:noFill/>
-          <a:ln/>
-        </p:spPr>
-        <p:txBody>
-          <a:bodyPr wrap="square" rtlCol="0" anchor="t"/>
-          <a:lstStyle/>
-          <a:p>
-            <a:pPr algn="l" marL="342900" indent="-342900">
-              <a:lnSpc>
-                <a:spcPts val="2600"/>
-              </a:lnSpc>
-              <a:buSzPct val="100000"/>
-              <a:buChar char="•"/>
-            </a:pPr>
-            <a:r>
-              <a:rPr lang="en-US" sz="1700" dirty="0">
-                <a:solidFill>
-                  <a:srgbClr val="1A1A1A"/>
-                </a:solidFill>
-                <a:latin typeface="Calibri" pitchFamily="34" charset="0"/>
-                <a:ea typeface="Calibri" pitchFamily="34" charset="-122"/>
-                <a:cs typeface="Calibri" pitchFamily="34" charset="-120"/>
-              </a:rPr>
-              <a:t>依頼文からスライド構成まで一気に用意する</a:t>
-            </a:r>
-            <a:endParaRPr lang="en-US" sz="1700" dirty="0"/>
-          </a:p>
-          <a:p>
-            <a:pPr algn="l" marL="342900" indent="-342900">
-              <a:lnSpc>
-                <a:spcPts val="2600"/>
-              </a:lnSpc>
-              <a:buSzPct val="100000"/>
-              <a:buChar char="•"/>
-            </a:pPr>
-            <a:r>
-              <a:rPr lang="en-US" sz="1700" dirty="0">
-                <a:solidFill>
-                  <a:srgbClr val="1A1A1A"/>
-                </a:solidFill>
-                <a:latin typeface="Calibri" pitchFamily="34" charset="0"/>
-                <a:ea typeface="Calibri" pitchFamily="34" charset="-122"/>
-                <a:cs typeface="Calibri" pitchFamily="34" charset="-120"/>
-              </a:rPr>
-              <a:t>目的・課題・提案・効果・次のアクションを固定順で揃える</a:t>
-            </a:r>
-            <a:endParaRPr lang="en-US" sz="1700" dirty="0"/>
-          </a:p>
-          <a:p>
-            <a:pPr algn="l" marL="342900" indent="-342900">
-              <a:lnSpc>
-                <a:spcPts val="2600"/>
-              </a:lnSpc>
-              <a:buSzPct val="100000"/>
-              <a:buChar char="•"/>
-            </a:pPr>
-            <a:r>
-              <a:rPr lang="en-US" sz="1700" dirty="0">
-                <a:solidFill>
-                  <a:srgbClr val="1A1A1A"/>
-                </a:solidFill>
-                <a:latin typeface="Calibri" pitchFamily="34" charset="0"/>
-                <a:ea typeface="Calibri" pitchFamily="34" charset="-122"/>
-                <a:cs typeface="Calibri" pitchFamily="34" charset="-120"/>
-              </a:rPr>
-              <a:t>完成ファイル（.pptx）をそのまま共有できる</a:t>
-            </a:r>
-            <a:endParaRPr lang="en-US" sz="1700" dirty="0"/>
-          </a:p>
-        </p:txBody>
-      </p:sp>
-    </p:spTree>
-  </p:cSld>
-  <p:clrMapOvr>
-    <a:masterClrMapping/>
-  </p:clrMapOvr>
-</p:sld>
-</file>
-
-<file path=ppt/slides/slide7.xml><?xml version="1.0" encoding="utf-8"?>
-<p:sld xmlns:a="http://schemas.openxmlformats.org/drawingml/2006/main" xmlns:r="http://schemas.openxmlformats.org/officeDocument/2006/relationships" xmlns:p="http://schemas.openxmlformats.org/presentationml/2006/main">
-  <p:cSld name="Slide 7">
-    <p:spTree>
-      <p:nvGrpSpPr>
-        <p:cNvPr id="1" name=""/>
-        <p:cNvGrpSpPr/>
-        <p:nvPr/>
-      </p:nvGrpSpPr>
-      <p:grpSpPr>
-        <a:xfrm>
-          <a:off x="0" y="0"/>
-          <a:ext cx="0" cy="0"/>
-          <a:chOff x="0" y="0"/>
-          <a:chExt cx="0" cy="0"/>
-        </a:xfrm>
-      </p:grpSpPr>
-      <p:sp>
-        <p:nvSpPr>
-          <p:cNvPr id="2" name="Shape 0"/>
-          <p:cNvSpPr/>
-          <p:nvPr/>
-        </p:nvSpPr>
-        <p:spPr>
-          <a:xfrm>
-            <a:off x="0" y="0"/>
-            <a:ext cx="411480" cy="5143500"/>
-          </a:xfrm>
-          <a:prstGeom prst="rect">
-            <a:avLst/>
-          </a:prstGeom>
-          <a:solidFill>
-            <a:srgbClr val="0B5CAB"/>
-          </a:solidFill>
-          <a:ln/>
-        </p:spPr>
-      </p:sp>
-      <p:sp>
-        <p:nvSpPr>
-          <p:cNvPr id="3" name="Text 1"/>
-          <p:cNvSpPr/>
-          <p:nvPr/>
-        </p:nvSpPr>
-        <p:spPr>
-          <a:xfrm>
-            <a:off x="731520" y="2103120"/>
-            <a:ext cx="7680960" cy="914400"/>
-          </a:xfrm>
-          <a:prstGeom prst="rect">
-            <a:avLst/>
-          </a:prstGeom>
-          <a:noFill/>
-          <a:ln/>
-        </p:spPr>
-        <p:txBody>
-          <a:bodyPr wrap="square" rtlCol="0" anchor="ctr"/>
-          <a:lstStyle/>
-          <a:p>
-            <a:pPr algn="l" indent="0" marL="0">
-              <a:buNone/>
-            </a:pPr>
-            <a:r>
-              <a:rPr lang="en-US" sz="3200" b="1" dirty="0">
-                <a:solidFill>
-                  <a:srgbClr val="0B5CAB"/>
-                </a:solidFill>
-                <a:latin typeface="Calibri" pitchFamily="34" charset="0"/>
-                <a:ea typeface="Calibri" pitchFamily="34" charset="-122"/>
-                <a:cs typeface="Calibri" pitchFamily="34" charset="-120"/>
-              </a:rPr>
-              <a:t>効果</a:t>
-            </a:r>
-            <a:endParaRPr lang="en-US" sz="3200" dirty="0"/>
-          </a:p>
-        </p:txBody>
-      </p:sp>
-    </p:spTree>
-  </p:cSld>
-  <p:clrMapOvr>
-    <a:masterClrMapping/>
-  </p:clrMapOvr>
-</p:sld>
-</file>
-
-<file path=ppt/slides/slide8.xml><?xml version="1.0" encoding="utf-8"?>
-<p:sld xmlns:a="http://schemas.openxmlformats.org/drawingml/2006/main" xmlns:r="http://schemas.openxmlformats.org/officeDocument/2006/relationships" xmlns:p="http://schemas.openxmlformats.org/presentationml/2006/main">
-  <p:cSld name="Slide 8">
-    <p:spTree>
-      <p:nvGrpSpPr>
-        <p:cNvPr id="1" name=""/>
-        <p:cNvGrpSpPr/>
-        <p:nvPr/>
-      </p:nvGrpSpPr>
-      <p:grpSpPr>
-        <a:xfrm>
-          <a:off x="0" y="0"/>
-          <a:ext cx="0" cy="0"/>
-          <a:chOff x="0" y="0"/>
-          <a:chExt cx="0" cy="0"/>
-        </a:xfrm>
-      </p:grpSpPr>
-      <p:sp>
-        <p:nvSpPr>
-          <p:cNvPr id="2" name="Shape 0"/>
-          <p:cNvSpPr/>
-          <p:nvPr/>
-        </p:nvSpPr>
-        <p:spPr>
-          <a:xfrm>
-            <a:off x="0" y="0"/>
-            <a:ext cx="201168" cy="5143500"/>
-          </a:xfrm>
-          <a:prstGeom prst="rect">
-            <a:avLst/>
-          </a:prstGeom>
-          <a:solidFill>
-            <a:srgbClr val="0B5CAB"/>
-          </a:solidFill>
-          <a:ln/>
-        </p:spPr>
-      </p:sp>
-      <p:sp>
-        <p:nvSpPr>
-          <p:cNvPr id="3" name="Text 1"/>
-          <p:cNvSpPr/>
-          <p:nvPr/>
-        </p:nvSpPr>
-        <p:spPr>
-          <a:xfrm>
-            <a:off x="502920" y="320040"/>
-            <a:ext cx="8046720" cy="640080"/>
-          </a:xfrm>
-          <a:prstGeom prst="rect">
-            <a:avLst/>
-          </a:prstGeom>
-          <a:noFill/>
-          <a:ln/>
-        </p:spPr>
-        <p:txBody>
-          <a:bodyPr wrap="square" rtlCol="0" anchor="ctr"/>
-          <a:lstStyle/>
-          <a:p>
-            <a:pPr indent="0" marL="0">
-              <a:buNone/>
-            </a:pPr>
-            <a:r>
-              <a:rPr lang="en-US" sz="2400" b="1" dirty="0">
-                <a:solidFill>
-                  <a:srgbClr val="0B5CAB"/>
-                </a:solidFill>
-                <a:latin typeface="Calibri" pitchFamily="34" charset="0"/>
-                <a:ea typeface="Calibri" pitchFamily="34" charset="-122"/>
-                <a:cs typeface="Calibri" pitchFamily="34" charset="-120"/>
-              </a:rPr>
-              <a:t>効果</a:t>
-            </a:r>
-            <a:endParaRPr lang="en-US" sz="2400" dirty="0"/>
-          </a:p>
-        </p:txBody>
-      </p:sp>
-      <p:sp>
-        <p:nvSpPr>
-          <p:cNvPr id="4" name="Shape 2"/>
-          <p:cNvSpPr/>
-          <p:nvPr/>
-        </p:nvSpPr>
-        <p:spPr>
-          <a:xfrm>
-            <a:off x="502920" y="960120"/>
-            <a:ext cx="8046720" cy="0"/>
-          </a:xfrm>
-          <a:prstGeom prst="line">
-            <a:avLst/>
-          </a:prstGeom>
-          <a:noFill/>
-          <a:ln w="25400">
-            <a:solidFill>
-              <a:srgbClr val="C9DBED"/>
-            </a:solidFill>
-            <a:prstDash val="solid"/>
-          </a:ln>
-        </p:spPr>
-      </p:sp>
-      <p:graphicFrame>
-        <p:nvGraphicFramePr>
-          <p:cNvPr id="9" name="Table 0"/>
-          <p:cNvGraphicFramePr>
-            <a:graphicFrameLocks noGrp="1"/>
-          </p:cNvGraphicFramePr>
-          <p:nvPr>
-            <p:extLst>
-              <p:ext uri="{D42A27DB-BD31-4B8C-83A1-F6EECF244321}">
-                <p14:modId xmlns:p14="http://schemas.microsoft.com/office/powerpoint/2010/main" val="1579011935"/>
-              </p:ext>
-            </p:extLst>
-          </p:nvPr>
-        </p:nvGraphicFramePr>
-        <p:xfrm>
-          <a:off x="594360" y="1234440"/>
-          <a:ext cx="7772400" cy="914400"/>
-        </p:xfrm>
-        <a:graphic>
-          <a:graphicData uri="http://schemas.openxmlformats.org/drawingml/2006/table">
-            <a:tbl>
-              <a:tblPr/>
-              <a:tblGrid>
-                <a:gridCol w="3886200"/>
-                <a:gridCol w="3886200"/>
-              </a:tblGrid>
-              <a:tr h="0">
-                <a:tc>
-                  <a:txBody>
-                    <a:bodyPr/>
-                    <a:lstStyle/>
-                    <a:p>
-                      <a:pPr algn="ctr" indent="0" marL="0">
-                        <a:buNone/>
-                      </a:pPr>
-                      <a:r>
-                        <a:rPr lang="en-US" sz="1200" b="1" dirty="0">
-                          <a:solidFill>
-                            <a:srgbClr val="FFFFFF"/>
-                          </a:solidFill>
-                          <a:latin typeface="Calibri" pitchFamily="34" charset="0"/>
-                          <a:ea typeface="Calibri" pitchFamily="34" charset="-122"/>
-                          <a:cs typeface="Calibri" pitchFamily="34" charset="-120"/>
-                        </a:rPr>
-                        <a:t>項目</a:t>
-                      </a:r>
-                      <a:endParaRPr lang="en-US" sz="1200" dirty="0">
-                        <a:latin typeface="Calibri" charset="0"/>
-                        <a:ea typeface="Calibri" charset="0"/>
-                        <a:cs typeface="Calibri" charset="0"/>
-                      </a:endParaRPr>
-                    </a:p>
-                  </a:txBody>
-                  <a:tcPr marL="91440" marR="91440" marT="45720" marB="45720" anchor="ctr">
-                    <a:lnL w="6350" cap="flat" cmpd="sng" algn="ctr">
-                      <a:solidFill>
-                        <a:srgbClr val="B0B0B0"/>
-                      </a:solidFill>
-                      <a:prstDash val="solid"/>
-                      <a:round/>
-                      <a:headEnd type="none" w="med" len="med"/>
-                      <a:tailEnd type="none" w="med" len="med"/>
-                    </a:lnL>
-                    <a:lnR w="6350" cap="flat" cmpd="sng" algn="ctr">
-                      <a:solidFill>
-                        <a:srgbClr val="B0B0B0"/>
-                      </a:solidFill>
-                      <a:prstDash val="solid"/>
-                      <a:round/>
-                      <a:headEnd type="none" w="med" len="med"/>
-                      <a:tailEnd type="none" w="med" len="med"/>
-                    </a:lnR>
-                    <a:lnT w="6350" cap="flat" cmpd="sng" algn="ctr">
-                      <a:solidFill>
-                        <a:srgbClr val="B0B0B0"/>
-                      </a:solidFill>
-                      <a:prstDash val="solid"/>
-                      <a:round/>
-                      <a:headEnd type="none" w="med" len="med"/>
-                      <a:tailEnd type="none" w="med" len="med"/>
-                    </a:lnT>
-                    <a:lnB w="6350" cap="flat" cmpd="sng" algn="ctr">
-                      <a:solidFill>
-                        <a:srgbClr val="B0B0B0"/>
-                      </a:solidFill>
-                      <a:prstDash val="solid"/>
-                      <a:round/>
-                      <a:headEnd type="none" w="med" len="med"/>
-                      <a:tailEnd type="none" w="med" len="med"/>
-                    </a:lnB>
-                    <a:solidFill>
-                      <a:srgbClr val="0B5CAB"/>
-                    </a:solidFill>
-                  </a:tcPr>
-                </a:tc>
-                <a:tc>
-                  <a:txBody>
-                    <a:bodyPr/>
-                    <a:lstStyle/>
-                    <a:p>
-                      <a:pPr algn="ctr" indent="0" marL="0">
-                        <a:buNone/>
-                      </a:pPr>
-                      <a:r>
-                        <a:rPr lang="en-US" sz="1200" b="1" dirty="0">
-                          <a:solidFill>
-                            <a:srgbClr val="FFFFFF"/>
-                          </a:solidFill>
-                          <a:latin typeface="Calibri" pitchFamily="34" charset="0"/>
-                          <a:ea typeface="Calibri" pitchFamily="34" charset="-122"/>
-                          <a:cs typeface="Calibri" pitchFamily="34" charset="-120"/>
-                        </a:rPr>
-                        <a:t>内容</a:t>
-                      </a:r>
-                      <a:endParaRPr lang="en-US" sz="1200" dirty="0">
-                        <a:latin typeface="Calibri" charset="0"/>
-                        <a:ea typeface="Calibri" charset="0"/>
-                        <a:cs typeface="Calibri" charset="0"/>
-                      </a:endParaRPr>
-                    </a:p>
-                  </a:txBody>
-                  <a:tcPr marL="91440" marR="91440" marT="45720" marB="45720" anchor="ctr">
-                    <a:lnL w="6350" cap="flat" cmpd="sng" algn="ctr">
-                      <a:solidFill>
-                        <a:srgbClr val="B0B0B0"/>
-                      </a:solidFill>
-                      <a:prstDash val="solid"/>
-                      <a:round/>
-                      <a:headEnd type="none" w="med" len="med"/>
-                      <a:tailEnd type="none" w="med" len="med"/>
-                    </a:lnL>
-                    <a:lnR w="6350" cap="flat" cmpd="sng" algn="ctr">
-                      <a:solidFill>
-                        <a:srgbClr val="B0B0B0"/>
-                      </a:solidFill>
-                      <a:prstDash val="solid"/>
-                      <a:round/>
-                      <a:headEnd type="none" w="med" len="med"/>
-                      <a:tailEnd type="none" w="med" len="med"/>
-                    </a:lnR>
-                    <a:lnT w="6350" cap="flat" cmpd="sng" algn="ctr">
-                      <a:solidFill>
-                        <a:srgbClr val="B0B0B0"/>
-                      </a:solidFill>
-                      <a:prstDash val="solid"/>
-                      <a:round/>
-                      <a:headEnd type="none" w="med" len="med"/>
-                      <a:tailEnd type="none" w="med" len="med"/>
-                    </a:lnT>
-                    <a:lnB w="6350" cap="flat" cmpd="sng" algn="ctr">
-                      <a:solidFill>
-                        <a:srgbClr val="B0B0B0"/>
-                      </a:solidFill>
-                      <a:prstDash val="solid"/>
-                      <a:round/>
-                      <a:headEnd type="none" w="med" len="med"/>
-                      <a:tailEnd type="none" w="med" len="med"/>
-                    </a:lnB>
-                    <a:solidFill>
-                      <a:srgbClr val="0B5CAB"/>
-                    </a:solidFill>
-                  </a:tcPr>
-                </a:tc>
-              </a:tr>
-            </a:tbl>
-          </a:graphicData>
-        </a:graphic>
-      </p:graphicFrame>
-    </p:spTree>
-  </p:cSld>
-  <p:clrMapOvr>
-    <a:masterClrMapping/>
-  </p:clrMapOvr>
-</p:sld>
-</file>
-
 <file path=ppt/slides/slide9.xml><?xml version="1.0" encoding="utf-8"?>
 <p:sld xmlns:a="http://schemas.openxmlformats.org/drawingml/2006/main" xmlns:r="http://schemas.openxmlformats.org/officeDocument/2006/relationships" xmlns:p="http://schemas.openxmlformats.org/presentationml/2006/main">
   <p:cSld name="Slide 9">
@@ -4525,7 +4395,7 @@
         <p:spPr>
           <a:xfrm>
             <a:off x="0" y="0"/>
-            <a:ext cx="201168" cy="5143500"/>
+            <a:ext cx="411480" cy="5143500"/>
           </a:xfrm>
           <a:prstGeom prst="rect">
             <a:avLst/>
@@ -4544,8 +4414,8 @@
         </p:nvSpPr>
         <p:spPr>
           <a:xfrm>
-            <a:off x="502920" y="320040"/>
-            <a:ext cx="8046720" cy="640080"/>
+            <a:off x="731520" y="2103120"/>
+            <a:ext cx="7680960" cy="914400"/>
           </a:xfrm>
           <a:prstGeom prst="rect">
             <a:avLst/>
@@ -4557,86 +4427,21 @@
           <a:bodyPr wrap="square" rtlCol="0" anchor="ctr"/>
           <a:lstStyle/>
           <a:p>
-            <a:pPr indent="0" marL="0">
+            <a:pPr algn="l" indent="0" marL="0">
               <a:buNone/>
             </a:pPr>
             <a:r>
-              <a:rPr lang="en-US" sz="2400" b="1" dirty="0">
+              <a:rPr lang="en-US" sz="3200" b="1" dirty="0">
                 <a:solidFill>
                   <a:srgbClr val="0B5CAB"/>
                 </a:solidFill>
-                <a:latin typeface="Calibri" pitchFamily="34" charset="0"/>
-                <a:ea typeface="Calibri" pitchFamily="34" charset="-122"/>
-                <a:cs typeface="Calibri" pitchFamily="34" charset="-120"/>
+                <a:latin typeface="Yu Gothic" pitchFamily="34" charset="0"/>
+                <a:ea typeface="Yu Gothic" pitchFamily="34" charset="-122"/>
+                <a:cs typeface="Yu Gothic" pitchFamily="34" charset="-120"/>
               </a:rPr>
-              <a:t>効果</a:t>
-            </a:r>
-            <a:endParaRPr lang="en-US" sz="2400" dirty="0"/>
-          </a:p>
-        </p:txBody>
-      </p:sp>
-      <p:sp>
-        <p:nvSpPr>
-          <p:cNvPr id="4" name="Shape 2"/>
-          <p:cNvSpPr/>
-          <p:nvPr/>
-        </p:nvSpPr>
-        <p:spPr>
-          <a:xfrm>
-            <a:off x="502920" y="960120"/>
-            <a:ext cx="8046720" cy="0"/>
-          </a:xfrm>
-          <a:prstGeom prst="line">
-            <a:avLst/>
-          </a:prstGeom>
-          <a:noFill/>
-          <a:ln w="25400">
-            <a:solidFill>
-              <a:srgbClr val="C9DBED"/>
-            </a:solidFill>
-            <a:prstDash val="solid"/>
-          </a:ln>
-        </p:spPr>
-      </p:sp>
-      <p:sp>
-        <p:nvSpPr>
-          <p:cNvPr id="5" name="Text 3"/>
-          <p:cNvSpPr/>
-          <p:nvPr/>
-        </p:nvSpPr>
-        <p:spPr>
-          <a:xfrm>
-            <a:off x="594360" y="1280160"/>
-            <a:ext cx="7772400" cy="4114800"/>
-          </a:xfrm>
-          <a:prstGeom prst="rect">
-            <a:avLst/>
-          </a:prstGeom>
-          <a:noFill/>
-          <a:ln/>
-        </p:spPr>
-        <p:txBody>
-          <a:bodyPr wrap="square" rtlCol="0" anchor="t"/>
-          <a:lstStyle/>
-          <a:p>
-            <a:pPr algn="l" indent="0" marL="0">
-              <a:lnSpc>
-                <a:spcPts val="2400"/>
-              </a:lnSpc>
-              <a:buNone/>
-            </a:pPr>
-            <a:r>
-              <a:rPr lang="en-US" sz="1600" dirty="0">
-                <a:solidFill>
-                  <a:srgbClr val="1A1A1A"/>
-                </a:solidFill>
-                <a:latin typeface="Calibri" pitchFamily="34" charset="0"/>
-                <a:ea typeface="Calibri" pitchFamily="34" charset="-122"/>
-                <a:cs typeface="Calibri" pitchFamily="34" charset="-120"/>
-              </a:rPr>
-              <a:t>| --- | --- |</a:t>
-            </a:r>
-            <a:endParaRPr lang="en-US" sz="1600" dirty="0"/>
+              <a:t>次のアクション</a:t>
+            </a:r>
+            <a:endParaRPr lang="en-US" sz="3200" dirty="0"/>
           </a:p>
         </p:txBody>
       </p:sp>
